--- a/wwwroot/FourPlatformLevelsofUniversalProgrammingLanguage.pptx
+++ b/wwwroot/FourPlatformLevelsofUniversalProgrammingLanguage.pptx
@@ -5,10 +5,10 @@
     <p:sldMasterId id="2147483648" r:id="rId1"/>
   </p:sldMasterIdLst>
   <p:notesMasterIdLst>
-    <p:notesMasterId r:id="rId14"/>
+    <p:notesMasterId r:id="rId17"/>
   </p:notesMasterIdLst>
   <p:handoutMasterIdLst>
-    <p:handoutMasterId r:id="rId15"/>
+    <p:handoutMasterId r:id="rId18"/>
   </p:handoutMasterIdLst>
   <p:sldIdLst>
     <p:sldId id="256" r:id="rId2"/>
@@ -19,10 +19,13 @@
     <p:sldId id="309" r:id="rId7"/>
     <p:sldId id="310" r:id="rId8"/>
     <p:sldId id="311" r:id="rId9"/>
-    <p:sldId id="313" r:id="rId10"/>
-    <p:sldId id="303" r:id="rId11"/>
-    <p:sldId id="305" r:id="rId12"/>
-    <p:sldId id="314" r:id="rId13"/>
+    <p:sldId id="315" r:id="rId10"/>
+    <p:sldId id="316" r:id="rId11"/>
+    <p:sldId id="317" r:id="rId12"/>
+    <p:sldId id="313" r:id="rId13"/>
+    <p:sldId id="303" r:id="rId14"/>
+    <p:sldId id="305" r:id="rId15"/>
+    <p:sldId id="314" r:id="rId16"/>
   </p:sldIdLst>
   <p:sldSz cx="9144000" cy="5143500" type="screen16x9"/>
   <p:notesSz cx="6858000" cy="9144000"/>
@@ -241,7 +244,7 @@
           <a:p>
             <a:fld id="{0F9B84EA-7D68-4D60-9CB1-D50884785D1C}" type="datetimeFigureOut">
               <a:rPr lang="zh-CN" altLang="en-US" smtClean="0"/>
-              <a:t>2023/3/9</a:t>
+              <a:t>2023/3/11</a:t>
             </a:fld>
             <a:endParaRPr lang="zh-CN" altLang="en-US"/>
           </a:p>
@@ -406,7 +409,7 @@
           <a:p>
             <a:fld id="{D2A48B96-639E-45A3-A0BA-2464DFDB1FAA}" type="datetimeFigureOut">
               <a:rPr lang="zh-CN" altLang="en-US" smtClean="0"/>
-              <a:t>2023/3/9</a:t>
+              <a:t>2023/3/11</a:t>
             </a:fld>
             <a:endParaRPr lang="zh-CN" altLang="en-US"/>
           </a:p>
@@ -801,7 +804,19 @@
           <a:bodyPr/>
           <a:lstStyle/>
           <a:p>
-            <a:endParaRPr lang="zh-CN" altLang="en-US"/>
+            <a:r>
+              <a:rPr lang="zh-CN" altLang="en-US" dirty="0" smtClean="0"/>
+              <a:t>第</a:t>
+            </a:r>
+            <a:r>
+              <a:rPr lang="en-US" altLang="zh-CN" dirty="0" smtClean="0"/>
+              <a:t>30</a:t>
+            </a:r>
+            <a:r>
+              <a:rPr lang="zh-CN" altLang="en-US" dirty="0" smtClean="0"/>
+              <a:t>分钟</a:t>
+            </a:r>
+            <a:endParaRPr lang="zh-CN" altLang="en-US" dirty="0"/>
           </a:p>
         </p:txBody>
       </p:sp>
@@ -831,7 +846,7 @@
     </p:spTree>
     <p:extLst>
       <p:ext uri="{BB962C8B-B14F-4D97-AF65-F5344CB8AC3E}">
-        <p14:creationId xmlns:p14="http://schemas.microsoft.com/office/powerpoint/2010/main" val="3371773617"/>
+        <p14:creationId xmlns:p14="http://schemas.microsoft.com/office/powerpoint/2010/main" val="1639612892"/>
       </p:ext>
     </p:extLst>
   </p:cSld>
@@ -907,6 +922,258 @@
             <a:fld id="{A6837353-30EB-4A48-80EB-173D804AEFBD}" type="slidenum">
               <a:rPr lang="zh-CN" altLang="en-US" smtClean="0"/>
               <a:t>11</a:t>
+            </a:fld>
+            <a:endParaRPr lang="zh-CN" altLang="en-US"/>
+          </a:p>
+        </p:txBody>
+      </p:sp>
+    </p:spTree>
+    <p:extLst>
+      <p:ext uri="{BB962C8B-B14F-4D97-AF65-F5344CB8AC3E}">
+        <p14:creationId xmlns:p14="http://schemas.microsoft.com/office/powerpoint/2010/main" val="2884024543"/>
+      </p:ext>
+    </p:extLst>
+  </p:cSld>
+  <p:clrMapOvr>
+    <a:masterClrMapping/>
+  </p:clrMapOvr>
+</p:notes>
+</file>
+
+<file path=ppt/notesSlides/notesSlide12.xml><?xml version="1.0" encoding="utf-8"?>
+<p:notes xmlns:a="http://schemas.openxmlformats.org/drawingml/2006/main" xmlns:r="http://schemas.openxmlformats.org/officeDocument/2006/relationships" xmlns:p="http://schemas.openxmlformats.org/presentationml/2006/main">
+  <p:cSld>
+    <p:spTree>
+      <p:nvGrpSpPr>
+        <p:cNvPr id="1" name=""/>
+        <p:cNvGrpSpPr/>
+        <p:nvPr/>
+      </p:nvGrpSpPr>
+      <p:grpSpPr>
+        <a:xfrm>
+          <a:off x="0" y="0"/>
+          <a:ext cx="0" cy="0"/>
+          <a:chOff x="0" y="0"/>
+          <a:chExt cx="0" cy="0"/>
+        </a:xfrm>
+      </p:grpSpPr>
+      <p:sp>
+        <p:nvSpPr>
+          <p:cNvPr id="2" name="幻灯片图像占位符 1"/>
+          <p:cNvSpPr>
+            <a:spLocks noGrp="1" noRot="1" noChangeAspect="1"/>
+          </p:cNvSpPr>
+          <p:nvPr>
+            <p:ph type="sldImg"/>
+          </p:nvPr>
+        </p:nvSpPr>
+        <p:spPr/>
+      </p:sp>
+      <p:sp>
+        <p:nvSpPr>
+          <p:cNvPr id="3" name="备注占位符 2"/>
+          <p:cNvSpPr>
+            <a:spLocks noGrp="1"/>
+          </p:cNvSpPr>
+          <p:nvPr>
+            <p:ph type="body" idx="1"/>
+          </p:nvPr>
+        </p:nvSpPr>
+        <p:spPr/>
+        <p:txBody>
+          <a:bodyPr/>
+          <a:lstStyle/>
+          <a:p>
+            <a:endParaRPr lang="zh-CN" altLang="en-US"/>
+          </a:p>
+        </p:txBody>
+      </p:sp>
+      <p:sp>
+        <p:nvSpPr>
+          <p:cNvPr id="4" name="灯片编号占位符 3"/>
+          <p:cNvSpPr>
+            <a:spLocks noGrp="1"/>
+          </p:cNvSpPr>
+          <p:nvPr>
+            <p:ph type="sldNum" sz="quarter" idx="10"/>
+          </p:nvPr>
+        </p:nvSpPr>
+        <p:spPr/>
+        <p:txBody>
+          <a:bodyPr/>
+          <a:lstStyle/>
+          <a:p>
+            <a:fld id="{A6837353-30EB-4A48-80EB-173D804AEFBD}" type="slidenum">
+              <a:rPr lang="zh-CN" altLang="en-US" smtClean="0"/>
+              <a:t>12</a:t>
+            </a:fld>
+            <a:endParaRPr lang="zh-CN" altLang="en-US"/>
+          </a:p>
+        </p:txBody>
+      </p:sp>
+    </p:spTree>
+    <p:extLst>
+      <p:ext uri="{BB962C8B-B14F-4D97-AF65-F5344CB8AC3E}">
+        <p14:creationId xmlns:p14="http://schemas.microsoft.com/office/powerpoint/2010/main" val="182956584"/>
+      </p:ext>
+    </p:extLst>
+  </p:cSld>
+  <p:clrMapOvr>
+    <a:masterClrMapping/>
+  </p:clrMapOvr>
+</p:notes>
+</file>
+
+<file path=ppt/notesSlides/notesSlide13.xml><?xml version="1.0" encoding="utf-8"?>
+<p:notes xmlns:a="http://schemas.openxmlformats.org/drawingml/2006/main" xmlns:r="http://schemas.openxmlformats.org/officeDocument/2006/relationships" xmlns:p="http://schemas.openxmlformats.org/presentationml/2006/main">
+  <p:cSld>
+    <p:spTree>
+      <p:nvGrpSpPr>
+        <p:cNvPr id="1" name=""/>
+        <p:cNvGrpSpPr/>
+        <p:nvPr/>
+      </p:nvGrpSpPr>
+      <p:grpSpPr>
+        <a:xfrm>
+          <a:off x="0" y="0"/>
+          <a:ext cx="0" cy="0"/>
+          <a:chOff x="0" y="0"/>
+          <a:chExt cx="0" cy="0"/>
+        </a:xfrm>
+      </p:grpSpPr>
+      <p:sp>
+        <p:nvSpPr>
+          <p:cNvPr id="2" name="幻灯片图像占位符 1"/>
+          <p:cNvSpPr>
+            <a:spLocks noGrp="1" noRot="1" noChangeAspect="1"/>
+          </p:cNvSpPr>
+          <p:nvPr>
+            <p:ph type="sldImg"/>
+          </p:nvPr>
+        </p:nvSpPr>
+        <p:spPr/>
+      </p:sp>
+      <p:sp>
+        <p:nvSpPr>
+          <p:cNvPr id="3" name="备注占位符 2"/>
+          <p:cNvSpPr>
+            <a:spLocks noGrp="1"/>
+          </p:cNvSpPr>
+          <p:nvPr>
+            <p:ph type="body" idx="1"/>
+          </p:nvPr>
+        </p:nvSpPr>
+        <p:spPr/>
+        <p:txBody>
+          <a:bodyPr/>
+          <a:lstStyle/>
+          <a:p>
+            <a:endParaRPr lang="zh-CN" altLang="en-US"/>
+          </a:p>
+        </p:txBody>
+      </p:sp>
+      <p:sp>
+        <p:nvSpPr>
+          <p:cNvPr id="4" name="灯片编号占位符 3"/>
+          <p:cNvSpPr>
+            <a:spLocks noGrp="1"/>
+          </p:cNvSpPr>
+          <p:nvPr>
+            <p:ph type="sldNum" sz="quarter" idx="10"/>
+          </p:nvPr>
+        </p:nvSpPr>
+        <p:spPr/>
+        <p:txBody>
+          <a:bodyPr/>
+          <a:lstStyle/>
+          <a:p>
+            <a:fld id="{A6837353-30EB-4A48-80EB-173D804AEFBD}" type="slidenum">
+              <a:rPr lang="zh-CN" altLang="en-US" smtClean="0"/>
+              <a:t>13</a:t>
+            </a:fld>
+            <a:endParaRPr lang="zh-CN" altLang="en-US"/>
+          </a:p>
+        </p:txBody>
+      </p:sp>
+    </p:spTree>
+    <p:extLst>
+      <p:ext uri="{BB962C8B-B14F-4D97-AF65-F5344CB8AC3E}">
+        <p14:creationId xmlns:p14="http://schemas.microsoft.com/office/powerpoint/2010/main" val="3371773617"/>
+      </p:ext>
+    </p:extLst>
+  </p:cSld>
+  <p:clrMapOvr>
+    <a:masterClrMapping/>
+  </p:clrMapOvr>
+</p:notes>
+</file>
+
+<file path=ppt/notesSlides/notesSlide14.xml><?xml version="1.0" encoding="utf-8"?>
+<p:notes xmlns:a="http://schemas.openxmlformats.org/drawingml/2006/main" xmlns:r="http://schemas.openxmlformats.org/officeDocument/2006/relationships" xmlns:p="http://schemas.openxmlformats.org/presentationml/2006/main">
+  <p:cSld>
+    <p:spTree>
+      <p:nvGrpSpPr>
+        <p:cNvPr id="1" name=""/>
+        <p:cNvGrpSpPr/>
+        <p:nvPr/>
+      </p:nvGrpSpPr>
+      <p:grpSpPr>
+        <a:xfrm>
+          <a:off x="0" y="0"/>
+          <a:ext cx="0" cy="0"/>
+          <a:chOff x="0" y="0"/>
+          <a:chExt cx="0" cy="0"/>
+        </a:xfrm>
+      </p:grpSpPr>
+      <p:sp>
+        <p:nvSpPr>
+          <p:cNvPr id="2" name="幻灯片图像占位符 1"/>
+          <p:cNvSpPr>
+            <a:spLocks noGrp="1" noRot="1" noChangeAspect="1"/>
+          </p:cNvSpPr>
+          <p:nvPr>
+            <p:ph type="sldImg"/>
+          </p:nvPr>
+        </p:nvSpPr>
+        <p:spPr/>
+      </p:sp>
+      <p:sp>
+        <p:nvSpPr>
+          <p:cNvPr id="3" name="备注占位符 2"/>
+          <p:cNvSpPr>
+            <a:spLocks noGrp="1"/>
+          </p:cNvSpPr>
+          <p:nvPr>
+            <p:ph type="body" idx="1"/>
+          </p:nvPr>
+        </p:nvSpPr>
+        <p:spPr/>
+        <p:txBody>
+          <a:bodyPr/>
+          <a:lstStyle/>
+          <a:p>
+            <a:endParaRPr lang="zh-CN" altLang="en-US"/>
+          </a:p>
+        </p:txBody>
+      </p:sp>
+      <p:sp>
+        <p:nvSpPr>
+          <p:cNvPr id="4" name="灯片编号占位符 3"/>
+          <p:cNvSpPr>
+            <a:spLocks noGrp="1"/>
+          </p:cNvSpPr>
+          <p:nvPr>
+            <p:ph type="sldNum" sz="quarter" idx="10"/>
+          </p:nvPr>
+        </p:nvSpPr>
+        <p:spPr/>
+        <p:txBody>
+          <a:bodyPr/>
+          <a:lstStyle/>
+          <a:p>
+            <a:fld id="{A6837353-30EB-4A48-80EB-173D804AEFBD}" type="slidenum">
+              <a:rPr lang="zh-CN" altLang="en-US" smtClean="0"/>
+              <a:t>14</a:t>
             </a:fld>
             <a:endParaRPr lang="zh-CN" altLang="en-US"/>
           </a:p>
@@ -969,7 +1236,19 @@
           <a:bodyPr/>
           <a:lstStyle/>
           <a:p>
-            <a:endParaRPr lang="zh-CN" altLang="en-US"/>
+            <a:r>
+              <a:rPr lang="zh-CN" altLang="en-US" dirty="0" smtClean="0"/>
+              <a:t>第</a:t>
+            </a:r>
+            <a:r>
+              <a:rPr lang="en-US" altLang="zh-CN" dirty="0" smtClean="0"/>
+              <a:t>0</a:t>
+            </a:r>
+            <a:r>
+              <a:rPr lang="zh-CN" altLang="en-US" dirty="0" smtClean="0"/>
+              <a:t>分钟</a:t>
+            </a:r>
+            <a:endParaRPr lang="zh-CN" altLang="en-US" dirty="0"/>
           </a:p>
         </p:txBody>
       </p:sp>
@@ -1053,7 +1332,19 @@
           <a:bodyPr/>
           <a:lstStyle/>
           <a:p>
-            <a:endParaRPr lang="zh-CN" altLang="en-US"/>
+            <a:r>
+              <a:rPr lang="zh-CN" altLang="en-US" dirty="0" smtClean="0"/>
+              <a:t>第</a:t>
+            </a:r>
+            <a:r>
+              <a:rPr lang="en-US" altLang="zh-CN" dirty="0" smtClean="0"/>
+              <a:t>2</a:t>
+            </a:r>
+            <a:r>
+              <a:rPr lang="zh-CN" altLang="en-US" dirty="0" smtClean="0"/>
+              <a:t>分钟</a:t>
+            </a:r>
+            <a:endParaRPr lang="zh-CN" altLang="en-US" dirty="0"/>
           </a:p>
         </p:txBody>
       </p:sp>
@@ -1137,7 +1428,19 @@
           <a:bodyPr/>
           <a:lstStyle/>
           <a:p>
-            <a:endParaRPr lang="zh-CN" altLang="en-US"/>
+            <a:r>
+              <a:rPr lang="zh-CN" altLang="en-US" dirty="0" smtClean="0"/>
+              <a:t>第</a:t>
+            </a:r>
+            <a:r>
+              <a:rPr lang="en-US" altLang="zh-CN" dirty="0" smtClean="0"/>
+              <a:t>5</a:t>
+            </a:r>
+            <a:r>
+              <a:rPr lang="zh-CN" altLang="en-US" dirty="0" smtClean="0"/>
+              <a:t>分钟</a:t>
+            </a:r>
+            <a:endParaRPr lang="zh-CN" altLang="en-US" dirty="0"/>
           </a:p>
         </p:txBody>
       </p:sp>
@@ -1557,7 +1860,19 @@
           <a:bodyPr/>
           <a:lstStyle/>
           <a:p>
-            <a:endParaRPr lang="zh-CN" altLang="en-US"/>
+            <a:r>
+              <a:rPr lang="zh-CN" altLang="en-US" dirty="0" smtClean="0"/>
+              <a:t>第</a:t>
+            </a:r>
+            <a:r>
+              <a:rPr lang="en-US" altLang="zh-CN" dirty="0" smtClean="0"/>
+              <a:t>15</a:t>
+            </a:r>
+            <a:r>
+              <a:rPr lang="zh-CN" altLang="en-US" dirty="0" smtClean="0"/>
+              <a:t>分钟</a:t>
+            </a:r>
+            <a:endParaRPr lang="zh-CN" altLang="en-US" dirty="0"/>
           </a:p>
         </p:txBody>
       </p:sp>
@@ -1587,7 +1902,7 @@
     </p:spTree>
     <p:extLst>
       <p:ext uri="{BB962C8B-B14F-4D97-AF65-F5344CB8AC3E}">
-        <p14:creationId xmlns:p14="http://schemas.microsoft.com/office/powerpoint/2010/main" val="182956584"/>
+        <p14:creationId xmlns:p14="http://schemas.microsoft.com/office/powerpoint/2010/main" val="1484073609"/>
       </p:ext>
     </p:extLst>
   </p:cSld>
@@ -1726,7 +2041,7 @@
           <a:p>
             <a:fld id="{82F288E0-7875-42C4-84C8-98DBBD3BF4D2}" type="datetimeFigureOut">
               <a:rPr lang="zh-CN" altLang="en-US" smtClean="0"/>
-              <a:t>2023/3/9</a:t>
+              <a:t>2023/3/11</a:t>
             </a:fld>
             <a:endParaRPr lang="zh-CN" altLang="en-US"/>
           </a:p>
@@ -1884,7 +2199,7 @@
           <a:p>
             <a:fld id="{82F288E0-7875-42C4-84C8-98DBBD3BF4D2}" type="datetimeFigureOut">
               <a:rPr lang="zh-CN" altLang="en-US" smtClean="0"/>
-              <a:t>2023/3/9</a:t>
+              <a:t>2023/3/11</a:t>
             </a:fld>
             <a:endParaRPr lang="zh-CN" altLang="en-US"/>
           </a:p>
@@ -2223,7 +2538,7 @@
           <a:p>
             <a:fld id="{82F288E0-7875-42C4-84C8-98DBBD3BF4D2}" type="datetimeFigureOut">
               <a:rPr lang="zh-CN" altLang="en-US" smtClean="0"/>
-              <a:t>2023/3/9</a:t>
+              <a:t>2023/3/11</a:t>
             </a:fld>
             <a:endParaRPr lang="zh-CN" altLang="en-US"/>
           </a:p>
@@ -2459,7 +2774,7 @@
           <a:p>
             <a:fld id="{82F288E0-7875-42C4-84C8-98DBBD3BF4D2}" type="datetimeFigureOut">
               <a:rPr lang="zh-CN" altLang="en-US" smtClean="0"/>
-              <a:t>2023/3/9</a:t>
+              <a:t>2023/3/11</a:t>
             </a:fld>
             <a:endParaRPr lang="zh-CN" altLang="en-US"/>
           </a:p>
@@ -2830,7 +3145,7 @@
           <a:p>
             <a:fld id="{82F288E0-7875-42C4-84C8-98DBBD3BF4D2}" type="datetimeFigureOut">
               <a:rPr lang="zh-CN" altLang="en-US" smtClean="0"/>
-              <a:t>2023/3/9</a:t>
+              <a:t>2023/3/11</a:t>
             </a:fld>
             <a:endParaRPr lang="zh-CN" altLang="en-US"/>
           </a:p>
@@ -2954,7 +3269,7 @@
           <a:p>
             <a:fld id="{82F288E0-7875-42C4-84C8-98DBBD3BF4D2}" type="datetimeFigureOut">
               <a:rPr lang="zh-CN" altLang="en-US" smtClean="0"/>
-              <a:t>2023/3/9</a:t>
+              <a:t>2023/3/11</a:t>
             </a:fld>
             <a:endParaRPr lang="zh-CN" altLang="en-US"/>
           </a:p>
@@ -3056,7 +3371,7 @@
           <a:p>
             <a:fld id="{82F288E0-7875-42C4-84C8-98DBBD3BF4D2}" type="datetimeFigureOut">
               <a:rPr lang="zh-CN" altLang="en-US" smtClean="0"/>
-              <a:t>2023/3/9</a:t>
+              <a:t>2023/3/11</a:t>
             </a:fld>
             <a:endParaRPr lang="zh-CN" altLang="en-US"/>
           </a:p>
@@ -3315,7 +3630,7 @@
           <a:p>
             <a:fld id="{82F288E0-7875-42C4-84C8-98DBBD3BF4D2}" type="datetimeFigureOut">
               <a:rPr lang="zh-CN" altLang="en-US" smtClean="0"/>
-              <a:t>2023/3/9</a:t>
+              <a:t>2023/3/11</a:t>
             </a:fld>
             <a:endParaRPr lang="zh-CN" altLang="en-US"/>
           </a:p>
@@ -3500,7 +3815,7 @@
           <a:p>
             <a:fld id="{82F288E0-7875-42C4-84C8-98DBBD3BF4D2}" type="datetimeFigureOut">
               <a:rPr lang="zh-CN" altLang="en-US" smtClean="0"/>
-              <a:t>2023/3/9</a:t>
+              <a:t>2023/3/11</a:t>
             </a:fld>
             <a:endParaRPr lang="zh-CN" altLang="en-US"/>
           </a:p>
@@ -3727,7 +4042,7 @@
           <a:p>
             <a:fld id="{82F288E0-7875-42C4-84C8-98DBBD3BF4D2}" type="datetimeFigureOut">
               <a:rPr lang="zh-CN" altLang="en-US" smtClean="0"/>
-              <a:t>2023/3/9</a:t>
+              <a:t>2023/3/11</a:t>
             </a:fld>
             <a:endParaRPr lang="zh-CN" altLang="en-US"/>
           </a:p>
@@ -4324,14 +4639,60 @@
       </p:grpSpPr>
       <p:sp>
         <p:nvSpPr>
-          <p:cNvPr id="25" name="文本框 10"/>
+          <p:cNvPr id="17" name="矩形 16"/>
+          <p:cNvSpPr/>
+          <p:nvPr/>
+        </p:nvSpPr>
+        <p:spPr>
+          <a:xfrm>
+            <a:off x="899740" y="3744966"/>
+            <a:ext cx="880668" cy="769214"/>
+          </a:xfrm>
+          <a:prstGeom prst="rect">
+            <a:avLst/>
+          </a:prstGeom>
+          <a:solidFill>
+            <a:srgbClr val="DCE3E8"/>
+          </a:solidFill>
+          <a:ln>
+            <a:noFill/>
+          </a:ln>
+        </p:spPr>
+        <p:style>
+          <a:lnRef idx="2">
+            <a:schemeClr val="accent1">
+              <a:shade val="50000"/>
+            </a:schemeClr>
+          </a:lnRef>
+          <a:fillRef idx="1">
+            <a:schemeClr val="accent1"/>
+          </a:fillRef>
+          <a:effectRef idx="0">
+            <a:schemeClr val="accent1"/>
+          </a:effectRef>
+          <a:fontRef idx="minor">
+            <a:schemeClr val="lt1"/>
+          </a:fontRef>
+        </p:style>
+        <p:txBody>
+          <a:bodyPr rtlCol="0" anchor="ctr"/>
+          <a:lstStyle/>
+          <a:p>
+            <a:pPr algn="ctr"/>
+            <a:endParaRPr lang="zh-CN" altLang="en-US" dirty="0"/>
+          </a:p>
+        </p:txBody>
+      </p:sp>
+      <p:sp>
+        <p:nvSpPr>
+          <p:cNvPr id="4" name="文本框 10"/>
           <p:cNvSpPr txBox="1"/>
           <p:nvPr/>
         </p:nvSpPr>
         <p:spPr>
           <a:xfrm>
-            <a:off x="580032" y="631513"/>
-            <a:ext cx="3134718" cy="369332"/>
+            <a:off x="477341" y="396563"/>
+            <a:ext cx="8005168" cy="461665"/>
           </a:xfrm>
           <a:prstGeom prst="rect">
             <a:avLst/>
@@ -4340,76 +4701,6 @@
         </p:spPr>
         <p:txBody>
           <a:bodyPr wrap="square" rtlCol="0">
-            <a:spAutoFit/>
-          </a:bodyPr>
-          <a:lstStyle/>
-          <a:p>
-            <a:r>
-              <a:rPr lang="zh-CN" altLang="en-US" sz="1800" dirty="0">
-                <a:solidFill>
-                  <a:srgbClr val="33495E"/>
-                </a:solidFill>
-                <a:latin typeface="微软雅黑" panose="020B0503020204020204" pitchFamily="34" charset="-122"/>
-                <a:ea typeface="微软雅黑" panose="020B0503020204020204" pitchFamily="34" charset="-122"/>
-                <a:sym typeface="+mn-ea"/>
-              </a:rPr>
-              <a:t>测验、小结、讲后思考</a:t>
-            </a:r>
-          </a:p>
-        </p:txBody>
-      </p:sp>
-      <p:sp>
-        <p:nvSpPr>
-          <p:cNvPr id="2" name="文本框 1">
-            <a:extLst>
-              <a:ext uri="{FF2B5EF4-FFF2-40B4-BE49-F238E27FC236}">
-                <a16:creationId xmlns:a16="http://schemas.microsoft.com/office/drawing/2014/main" xmlns="" id="{438813D7-676E-4BB1-8BD1-AA790C109740}"/>
-              </a:ext>
-            </a:extLst>
-          </p:cNvPr>
-          <p:cNvSpPr txBox="1"/>
-          <p:nvPr/>
-        </p:nvSpPr>
-        <p:spPr>
-          <a:xfrm>
-            <a:off x="5745862" y="4551431"/>
-            <a:ext cx="3010788" cy="307777"/>
-          </a:xfrm>
-          <a:prstGeom prst="rect">
-            <a:avLst/>
-          </a:prstGeom>
-          <a:noFill/>
-        </p:spPr>
-        <p:txBody>
-          <a:bodyPr wrap="square" rtlCol="0">
-            <a:spAutoFit/>
-          </a:bodyPr>
-          <a:lstStyle/>
-          <a:p>
-            <a:r>
-              <a:rPr lang="zh-CN" altLang="en-US" b="1" dirty="0"/>
-              <a:t>（学思结合、知行统一、实事求是）</a:t>
-            </a:r>
-          </a:p>
-        </p:txBody>
-      </p:sp>
-      <p:sp>
-        <p:nvSpPr>
-          <p:cNvPr id="3" name="Rectangle 2"/>
-          <p:cNvSpPr/>
-          <p:nvPr/>
-        </p:nvSpPr>
-        <p:spPr>
-          <a:xfrm>
-            <a:off x="533400" y="1087248"/>
-            <a:ext cx="8223250" cy="3267561"/>
-          </a:xfrm>
-          <a:prstGeom prst="rect">
-            <a:avLst/>
-          </a:prstGeom>
-        </p:spPr>
-        <p:txBody>
-          <a:bodyPr wrap="square">
             <a:spAutoFit/>
           </a:bodyPr>
           <a:lstStyle/>
@@ -4423,16 +4714,16 @@
               </a:buClr>
             </a:pPr>
             <a:r>
-              <a:rPr lang="zh-CN" altLang="en-US" sz="3500" b="1" dirty="0" smtClean="0">
+              <a:rPr lang="zh-CN" altLang="en-US" sz="2400" b="1" dirty="0">
                 <a:solidFill>
                   <a:srgbClr val="19B49B"/>
                 </a:solidFill>
                 <a:latin typeface="微软雅黑" panose="020B0503020204020204" pitchFamily="34" charset="-122"/>
                 <a:ea typeface="微软雅黑" panose="020B0503020204020204" pitchFamily="34" charset="-122"/>
               </a:rPr>
-              <a:t>关于计算机语言的说法错误的是：</a:t>
-            </a:r>
-            <a:endParaRPr lang="en-US" altLang="zh-CN" sz="3500" b="1" dirty="0">
+              <a:t>通用编程语言在教育软件开发中的应用：</a:t>
+            </a:r>
+            <a:endParaRPr lang="en-US" altLang="zh-CN" sz="2400" b="1" dirty="0">
               <a:solidFill>
                 <a:srgbClr val="19B49B"/>
               </a:solidFill>
@@ -4440,354 +4731,34 @@
               <a:ea typeface="微软雅黑" panose="020B0503020204020204" pitchFamily="34" charset="-122"/>
             </a:endParaRPr>
           </a:p>
-          <a:p>
-            <a:pPr marL="339528" indent="-339528" algn="just">
-              <a:spcBef>
-                <a:spcPts val="600"/>
-              </a:spcBef>
-              <a:spcAft>
-                <a:spcPts val="713"/>
-              </a:spcAft>
-              <a:buClr>
-                <a:srgbClr val="00544A"/>
-              </a:buClr>
-              <a:buFont typeface="Wingdings" panose="05000000000000000000" pitchFamily="2" charset="2"/>
-              <a:buChar char="Ø"/>
-            </a:pPr>
-            <a:r>
-              <a:rPr lang="en-US" altLang="zh-CN" sz="2300" dirty="0" smtClean="0">
-                <a:solidFill>
-                  <a:srgbClr val="00B050"/>
-                </a:solidFill>
-                <a:latin typeface="微软雅黑" panose="020B0503020204020204" pitchFamily="34" charset="-122"/>
-                <a:ea typeface="微软雅黑" panose="020B0503020204020204" pitchFamily="34" charset="-122"/>
-              </a:rPr>
-              <a:t>A</a:t>
-            </a:r>
-            <a:r>
-              <a:rPr lang="zh-CN" altLang="en-US" sz="2300" dirty="0" smtClean="0">
-                <a:solidFill>
-                  <a:srgbClr val="00B050"/>
-                </a:solidFill>
-                <a:latin typeface="微软雅黑" panose="020B0503020204020204" pitchFamily="34" charset="-122"/>
-                <a:ea typeface="微软雅黑" panose="020B0503020204020204" pitchFamily="34" charset="-122"/>
-              </a:rPr>
-              <a:t>．</a:t>
-            </a:r>
-            <a:r>
-              <a:rPr lang="zh-CN" altLang="en-US" sz="2300" dirty="0">
-                <a:solidFill>
-                  <a:srgbClr val="00B050"/>
-                </a:solidFill>
-                <a:latin typeface="微软雅黑" panose="020B0503020204020204" pitchFamily="34" charset="-122"/>
-                <a:ea typeface="微软雅黑" panose="020B0503020204020204" pitchFamily="34" charset="-122"/>
-              </a:rPr>
-              <a:t>本质是“计算机</a:t>
-            </a:r>
-            <a:r>
-              <a:rPr lang="en-US" altLang="zh-CN" sz="2300" dirty="0">
-                <a:solidFill>
-                  <a:srgbClr val="00B050"/>
-                </a:solidFill>
-                <a:latin typeface="微软雅黑" panose="020B0503020204020204" pitchFamily="34" charset="-122"/>
-                <a:ea typeface="微软雅黑" panose="020B0503020204020204" pitchFamily="34" charset="-122"/>
-              </a:rPr>
-              <a:t>CPU</a:t>
-            </a:r>
-            <a:r>
-              <a:rPr lang="zh-CN" altLang="en-US" sz="2300" dirty="0">
-                <a:solidFill>
-                  <a:srgbClr val="00B050"/>
-                </a:solidFill>
-                <a:latin typeface="微软雅黑" panose="020B0503020204020204" pitchFamily="34" charset="-122"/>
-                <a:ea typeface="微软雅黑" panose="020B0503020204020204" pitchFamily="34" charset="-122"/>
-              </a:rPr>
-              <a:t>平台的</a:t>
-            </a:r>
-            <a:r>
-              <a:rPr lang="en-US" altLang="zh-CN" sz="2300" dirty="0">
-                <a:solidFill>
-                  <a:srgbClr val="00B050"/>
-                </a:solidFill>
-                <a:latin typeface="微软雅黑" panose="020B0503020204020204" pitchFamily="34" charset="-122"/>
-                <a:ea typeface="微软雅黑" panose="020B0503020204020204" pitchFamily="34" charset="-122"/>
-              </a:rPr>
-              <a:t>0/1</a:t>
-            </a:r>
-            <a:r>
-              <a:rPr lang="zh-CN" altLang="en-US" sz="2300" dirty="0">
-                <a:solidFill>
-                  <a:srgbClr val="00B050"/>
-                </a:solidFill>
-                <a:latin typeface="微软雅黑" panose="020B0503020204020204" pitchFamily="34" charset="-122"/>
-                <a:ea typeface="微软雅黑" panose="020B0503020204020204" pitchFamily="34" charset="-122"/>
-              </a:rPr>
-              <a:t>的语言”隐喻“人脑平台的字符</a:t>
-            </a:r>
-            <a:r>
-              <a:rPr lang="en-US" altLang="zh-CN" sz="2300" dirty="0">
-                <a:solidFill>
-                  <a:srgbClr val="00B050"/>
-                </a:solidFill>
-                <a:latin typeface="微软雅黑" panose="020B0503020204020204" pitchFamily="34" charset="-122"/>
-                <a:ea typeface="微软雅黑" panose="020B0503020204020204" pitchFamily="34" charset="-122"/>
-              </a:rPr>
-              <a:t>/</a:t>
-            </a:r>
-            <a:r>
-              <a:rPr lang="zh-CN" altLang="en-US" sz="2300" dirty="0">
-                <a:solidFill>
-                  <a:srgbClr val="00B050"/>
-                </a:solidFill>
-                <a:latin typeface="微软雅黑" panose="020B0503020204020204" pitchFamily="34" charset="-122"/>
-                <a:ea typeface="微软雅黑" panose="020B0503020204020204" pitchFamily="34" charset="-122"/>
-              </a:rPr>
-              <a:t>非字符的语言”。</a:t>
-            </a:r>
-            <a:endParaRPr lang="en-US" altLang="zh-CN" sz="2300" dirty="0" smtClean="0">
-              <a:solidFill>
-                <a:srgbClr val="00B050"/>
-              </a:solidFill>
-              <a:latin typeface="微软雅黑" panose="020B0503020204020204" pitchFamily="34" charset="-122"/>
-              <a:ea typeface="微软雅黑" panose="020B0503020204020204" pitchFamily="34" charset="-122"/>
-            </a:endParaRPr>
-          </a:p>
-          <a:p>
-            <a:pPr marL="339528" indent="-339528" algn="just">
-              <a:spcBef>
-                <a:spcPts val="600"/>
-              </a:spcBef>
-              <a:spcAft>
-                <a:spcPts val="713"/>
-              </a:spcAft>
-              <a:buClr>
-                <a:srgbClr val="00544A"/>
-              </a:buClr>
-              <a:buFont typeface="Wingdings" panose="05000000000000000000" pitchFamily="2" charset="2"/>
-              <a:buChar char="Ø"/>
-            </a:pPr>
-            <a:r>
-              <a:rPr lang="en-US" altLang="zh-CN" sz="2300" dirty="0" smtClean="0">
-                <a:solidFill>
-                  <a:srgbClr val="00B050"/>
-                </a:solidFill>
-                <a:latin typeface="微软雅黑" panose="020B0503020204020204" pitchFamily="34" charset="-122"/>
-                <a:ea typeface="微软雅黑" panose="020B0503020204020204" pitchFamily="34" charset="-122"/>
-              </a:rPr>
-              <a:t>B</a:t>
-            </a:r>
-            <a:r>
-              <a:rPr lang="zh-CN" altLang="en-US" sz="2300" dirty="0" smtClean="0">
-                <a:solidFill>
-                  <a:srgbClr val="00B050"/>
-                </a:solidFill>
-                <a:latin typeface="微软雅黑" panose="020B0503020204020204" pitchFamily="34" charset="-122"/>
-                <a:ea typeface="微软雅黑" panose="020B0503020204020204" pitchFamily="34" charset="-122"/>
-              </a:rPr>
-              <a:t>．与人类语言基本无关。</a:t>
-            </a:r>
-            <a:endParaRPr lang="zh-CN" altLang="en-US" sz="2300" dirty="0">
-              <a:solidFill>
-                <a:srgbClr val="00B050"/>
-              </a:solidFill>
-              <a:latin typeface="微软雅黑" panose="020B0503020204020204" pitchFamily="34" charset="-122"/>
-              <a:ea typeface="微软雅黑" panose="020B0503020204020204" pitchFamily="34" charset="-122"/>
-            </a:endParaRPr>
-          </a:p>
-          <a:p>
-            <a:pPr marL="339528" indent="-339528" algn="just">
-              <a:spcAft>
-                <a:spcPts val="713"/>
-              </a:spcAft>
-              <a:buClr>
-                <a:srgbClr val="00544A"/>
-              </a:buClr>
-              <a:buFont typeface="Wingdings" panose="05000000000000000000" pitchFamily="2" charset="2"/>
-              <a:buChar char="Ø"/>
-            </a:pPr>
-            <a:r>
-              <a:rPr lang="en-US" altLang="zh-CN" sz="2300" dirty="0">
-                <a:solidFill>
-                  <a:srgbClr val="00B050"/>
-                </a:solidFill>
-                <a:latin typeface="微软雅黑" panose="020B0503020204020204" pitchFamily="34" charset="-122"/>
-                <a:ea typeface="微软雅黑" panose="020B0503020204020204" pitchFamily="34" charset="-122"/>
-              </a:rPr>
-              <a:t>C</a:t>
-            </a:r>
-            <a:r>
-              <a:rPr lang="zh-CN" altLang="en-US" sz="2300" dirty="0">
-                <a:solidFill>
-                  <a:srgbClr val="00B050"/>
-                </a:solidFill>
-                <a:latin typeface="微软雅黑" panose="020B0503020204020204" pitchFamily="34" charset="-122"/>
-                <a:ea typeface="微软雅黑" panose="020B0503020204020204" pitchFamily="34" charset="-122"/>
-              </a:rPr>
-              <a:t>．计算机</a:t>
-            </a:r>
-            <a:r>
-              <a:rPr lang="zh-CN" altLang="en-US" sz="2300" dirty="0" smtClean="0">
-                <a:solidFill>
-                  <a:srgbClr val="00B050"/>
-                </a:solidFill>
-                <a:latin typeface="微软雅黑" panose="020B0503020204020204" pitchFamily="34" charset="-122"/>
-                <a:ea typeface="微软雅黑" panose="020B0503020204020204" pitchFamily="34" charset="-122"/>
-              </a:rPr>
-              <a:t>语言代码保存成为文件，然后可在</a:t>
-            </a:r>
-            <a:r>
-              <a:rPr lang="en-US" altLang="zh-CN" sz="2300" dirty="0" smtClean="0">
-                <a:solidFill>
-                  <a:srgbClr val="00B050"/>
-                </a:solidFill>
-                <a:latin typeface="微软雅黑" panose="020B0503020204020204" pitchFamily="34" charset="-122"/>
-                <a:ea typeface="微软雅黑" panose="020B0503020204020204" pitchFamily="34" charset="-122"/>
-              </a:rPr>
-              <a:t>CPU</a:t>
-            </a:r>
-            <a:r>
-              <a:rPr lang="zh-CN" altLang="en-US" sz="2300" dirty="0" smtClean="0">
-                <a:solidFill>
-                  <a:srgbClr val="00B050"/>
-                </a:solidFill>
-                <a:latin typeface="微软雅黑" panose="020B0503020204020204" pitchFamily="34" charset="-122"/>
-                <a:ea typeface="微软雅黑" panose="020B0503020204020204" pitchFamily="34" charset="-122"/>
-              </a:rPr>
-              <a:t>中运行。</a:t>
-            </a:r>
-            <a:endParaRPr lang="en-US" altLang="zh-CN" sz="2300" dirty="0" smtClean="0">
-              <a:solidFill>
-                <a:srgbClr val="00B050"/>
-              </a:solidFill>
-              <a:latin typeface="微软雅黑" panose="020B0503020204020204" pitchFamily="34" charset="-122"/>
-              <a:ea typeface="微软雅黑" panose="020B0503020204020204" pitchFamily="34" charset="-122"/>
-            </a:endParaRPr>
-          </a:p>
-          <a:p>
-            <a:pPr marL="339528" indent="-339528" algn="just">
-              <a:spcAft>
-                <a:spcPts val="713"/>
-              </a:spcAft>
-              <a:buClr>
-                <a:srgbClr val="00544A"/>
-              </a:buClr>
-              <a:buFont typeface="Wingdings" panose="05000000000000000000" pitchFamily="2" charset="2"/>
-              <a:buChar char="Ø"/>
-            </a:pPr>
-            <a:r>
-              <a:rPr lang="en-US" altLang="zh-CN" sz="2300" dirty="0" smtClean="0">
-                <a:solidFill>
-                  <a:srgbClr val="00B050"/>
-                </a:solidFill>
-                <a:latin typeface="微软雅黑" panose="020B0503020204020204" pitchFamily="34" charset="-122"/>
-                <a:ea typeface="微软雅黑" panose="020B0503020204020204" pitchFamily="34" charset="-122"/>
-              </a:rPr>
-              <a:t>D</a:t>
-            </a:r>
-            <a:r>
-              <a:rPr lang="zh-CN" altLang="en-US" sz="2300" dirty="0" smtClean="0">
-                <a:solidFill>
-                  <a:srgbClr val="00B050"/>
-                </a:solidFill>
-                <a:latin typeface="微软雅黑" panose="020B0503020204020204" pitchFamily="34" charset="-122"/>
-                <a:ea typeface="微软雅黑" panose="020B0503020204020204" pitchFamily="34" charset="-122"/>
-              </a:rPr>
-              <a:t>．学术领域认为计算机语言包含“</a:t>
-            </a:r>
-            <a:r>
-              <a:rPr lang="en-US" altLang="zh-CN" sz="2300" dirty="0">
-                <a:solidFill>
-                  <a:srgbClr val="00B050"/>
-                </a:solidFill>
-                <a:latin typeface="微软雅黑" panose="020B0503020204020204" pitchFamily="34" charset="-122"/>
-                <a:ea typeface="微软雅黑" panose="020B0503020204020204" pitchFamily="34" charset="-122"/>
-              </a:rPr>
-              <a:t>C--(ASM)</a:t>
-            </a:r>
-            <a:r>
-              <a:rPr lang="zh-CN" altLang="en-US" sz="2300" dirty="0">
-                <a:solidFill>
-                  <a:srgbClr val="00B050"/>
-                </a:solidFill>
-                <a:latin typeface="微软雅黑" panose="020B0503020204020204" pitchFamily="34" charset="-122"/>
-                <a:ea typeface="微软雅黑" panose="020B0503020204020204" pitchFamily="34" charset="-122"/>
-              </a:rPr>
-              <a:t>、</a:t>
-            </a:r>
-            <a:r>
-              <a:rPr lang="en-US" altLang="zh-CN" sz="2300" dirty="0">
-                <a:solidFill>
-                  <a:srgbClr val="00B050"/>
-                </a:solidFill>
-                <a:latin typeface="微软雅黑" panose="020B0503020204020204" pitchFamily="34" charset="-122"/>
-                <a:ea typeface="微软雅黑" panose="020B0503020204020204" pitchFamily="34" charset="-122"/>
-              </a:rPr>
-              <a:t>C</a:t>
-            </a:r>
-            <a:r>
-              <a:rPr lang="zh-CN" altLang="en-US" sz="2300" dirty="0">
-                <a:solidFill>
-                  <a:srgbClr val="00B050"/>
-                </a:solidFill>
-                <a:latin typeface="微软雅黑" panose="020B0503020204020204" pitchFamily="34" charset="-122"/>
-                <a:ea typeface="微软雅黑" panose="020B0503020204020204" pitchFamily="34" charset="-122"/>
-              </a:rPr>
-              <a:t>、</a:t>
-            </a:r>
-            <a:r>
-              <a:rPr lang="en-US" altLang="zh-CN" sz="2300" dirty="0">
-                <a:solidFill>
-                  <a:srgbClr val="00B050"/>
-                </a:solidFill>
-                <a:latin typeface="微软雅黑" panose="020B0503020204020204" pitchFamily="34" charset="-122"/>
-                <a:ea typeface="微软雅黑" panose="020B0503020204020204" pitchFamily="34" charset="-122"/>
-              </a:rPr>
-              <a:t>C++</a:t>
-            </a:r>
-            <a:r>
-              <a:rPr lang="zh-CN" altLang="en-US" sz="2300" dirty="0">
-                <a:solidFill>
-                  <a:srgbClr val="00B050"/>
-                </a:solidFill>
-                <a:latin typeface="微软雅黑" panose="020B0503020204020204" pitchFamily="34" charset="-122"/>
-                <a:ea typeface="微软雅黑" panose="020B0503020204020204" pitchFamily="34" charset="-122"/>
-              </a:rPr>
-              <a:t>、</a:t>
-            </a:r>
-            <a:r>
-              <a:rPr lang="en-US" altLang="zh-CN" sz="2300" dirty="0">
-                <a:solidFill>
-                  <a:srgbClr val="00B050"/>
-                </a:solidFill>
-                <a:latin typeface="微软雅黑" panose="020B0503020204020204" pitchFamily="34" charset="-122"/>
-                <a:ea typeface="微软雅黑" panose="020B0503020204020204" pitchFamily="34" charset="-122"/>
-              </a:rPr>
-              <a:t>C++++(C#)</a:t>
-            </a:r>
-            <a:r>
-              <a:rPr lang="zh-CN" altLang="en-US" sz="2300" dirty="0" smtClean="0">
-                <a:solidFill>
-                  <a:srgbClr val="00B050"/>
-                </a:solidFill>
-                <a:latin typeface="微软雅黑" panose="020B0503020204020204" pitchFamily="34" charset="-122"/>
-                <a:ea typeface="微软雅黑" panose="020B0503020204020204" pitchFamily="34" charset="-122"/>
-              </a:rPr>
-              <a:t>”四个平台层次。</a:t>
-            </a:r>
-            <a:endParaRPr lang="zh-CN" altLang="en-US" sz="2300" dirty="0">
-              <a:solidFill>
-                <a:srgbClr val="00B050"/>
-              </a:solidFill>
-              <a:latin typeface="微软雅黑" panose="020B0503020204020204" pitchFamily="34" charset="-122"/>
-              <a:ea typeface="微软雅黑" panose="020B0503020204020204" pitchFamily="34" charset="-122"/>
-            </a:endParaRPr>
-          </a:p>
-        </p:txBody>
-      </p:sp>
+        </p:txBody>
+      </p:sp>
+      <p:pic>
+        <p:nvPicPr>
+          <p:cNvPr id="6" name="Picture 5"/>
+          <p:cNvPicPr/>
+          <p:nvPr/>
+        </p:nvPicPr>
+        <p:blipFill>
+          <a:blip r:embed="rId3"/>
+          <a:stretch>
+            <a:fillRect/>
+          </a:stretch>
+        </p:blipFill>
+        <p:spPr>
+          <a:xfrm>
+            <a:off x="1018195" y="1054100"/>
+            <a:ext cx="6923459" cy="3460080"/>
+          </a:xfrm>
+          <a:prstGeom prst="rect">
+            <a:avLst/>
+          </a:prstGeom>
+        </p:spPr>
+      </p:pic>
     </p:spTree>
     <p:extLst>
       <p:ext uri="{BB962C8B-B14F-4D97-AF65-F5344CB8AC3E}">
-        <p14:creationId xmlns:p14="http://schemas.microsoft.com/office/powerpoint/2010/main" val="4054709148"/>
+        <p14:creationId xmlns:p14="http://schemas.microsoft.com/office/powerpoint/2010/main" val="1147595948"/>
       </p:ext>
     </p:extLst>
   </p:cSld>
@@ -4835,14 +4806,60 @@
       </p:grpSpPr>
       <p:sp>
         <p:nvSpPr>
-          <p:cNvPr id="10" name="文本框 9"/>
+          <p:cNvPr id="17" name="矩形 16"/>
+          <p:cNvSpPr/>
+          <p:nvPr/>
+        </p:nvSpPr>
+        <p:spPr>
+          <a:xfrm>
+            <a:off x="899740" y="3744966"/>
+            <a:ext cx="880668" cy="769214"/>
+          </a:xfrm>
+          <a:prstGeom prst="rect">
+            <a:avLst/>
+          </a:prstGeom>
+          <a:solidFill>
+            <a:srgbClr val="DCE3E8"/>
+          </a:solidFill>
+          <a:ln>
+            <a:noFill/>
+          </a:ln>
+        </p:spPr>
+        <p:style>
+          <a:lnRef idx="2">
+            <a:schemeClr val="accent1">
+              <a:shade val="50000"/>
+            </a:schemeClr>
+          </a:lnRef>
+          <a:fillRef idx="1">
+            <a:schemeClr val="accent1"/>
+          </a:fillRef>
+          <a:effectRef idx="0">
+            <a:schemeClr val="accent1"/>
+          </a:effectRef>
+          <a:fontRef idx="minor">
+            <a:schemeClr val="lt1"/>
+          </a:fontRef>
+        </p:style>
+        <p:txBody>
+          <a:bodyPr rtlCol="0" anchor="ctr"/>
+          <a:lstStyle/>
+          <a:p>
+            <a:pPr algn="ctr"/>
+            <a:endParaRPr lang="zh-CN" altLang="en-US" dirty="0"/>
+          </a:p>
+        </p:txBody>
+      </p:sp>
+      <p:sp>
+        <p:nvSpPr>
+          <p:cNvPr id="4" name="文本框 10"/>
           <p:cNvSpPr txBox="1"/>
           <p:nvPr/>
         </p:nvSpPr>
         <p:spPr>
           <a:xfrm>
-            <a:off x="2435781" y="1245349"/>
-            <a:ext cx="4272439" cy="1177245"/>
+            <a:off x="477341" y="396563"/>
+            <a:ext cx="8005168" cy="461665"/>
           </a:xfrm>
           <a:prstGeom prst="rect">
             <a:avLst/>
@@ -4850,81 +4867,134 @@
           <a:noFill/>
         </p:spPr>
         <p:txBody>
-          <a:bodyPr wrap="square" lIns="68580" tIns="34290" rIns="68580" bIns="34290" rtlCol="0">
+          <a:bodyPr wrap="square" rtlCol="0">
             <a:spAutoFit/>
           </a:bodyPr>
           <a:lstStyle/>
           <a:p>
-            <a:pPr algn="ctr">
-              <a:defRPr/>
+            <a:pPr algn="just">
+              <a:spcAft>
+                <a:spcPts val="713"/>
+              </a:spcAft>
+              <a:buClr>
+                <a:srgbClr val="00544A"/>
+              </a:buClr>
             </a:pPr>
             <a:r>
-              <a:rPr lang="en-US" altLang="zh-CN" sz="7200" dirty="0">
-                <a:solidFill>
-                  <a:srgbClr val="33495E"/>
-                </a:solidFill>
-                <a:latin typeface="微软雅黑" panose="020B0503020204020204" pitchFamily="34" charset="-122"/>
-                <a:ea typeface="微软雅黑" panose="020B0503020204020204" pitchFamily="34" charset="-122"/>
-                <a:sym typeface="+mn-ea"/>
-              </a:rPr>
-              <a:t>THANKS</a:t>
-            </a:r>
-          </a:p>
-        </p:txBody>
-      </p:sp>
-      <p:sp>
-        <p:nvSpPr>
-          <p:cNvPr id="2" name="文本框 1"/>
-          <p:cNvSpPr txBox="1"/>
+              <a:rPr lang="zh-CN" altLang="en-US" sz="2400" b="1" dirty="0">
+                <a:solidFill>
+                  <a:srgbClr val="19B49B"/>
+                </a:solidFill>
+                <a:latin typeface="微软雅黑" panose="020B0503020204020204" pitchFamily="34" charset="-122"/>
+                <a:ea typeface="微软雅黑" panose="020B0503020204020204" pitchFamily="34" charset="-122"/>
+              </a:rPr>
+              <a:t>通用编程语言的自然与人文的统一：</a:t>
+            </a:r>
+            <a:endParaRPr lang="en-US" altLang="zh-CN" sz="2400" b="1" dirty="0">
+              <a:solidFill>
+                <a:srgbClr val="19B49B"/>
+              </a:solidFill>
+              <a:latin typeface="微软雅黑" panose="020B0503020204020204" pitchFamily="34" charset="-122"/>
+              <a:ea typeface="微软雅黑" panose="020B0503020204020204" pitchFamily="34" charset="-122"/>
+            </a:endParaRPr>
+          </a:p>
+        </p:txBody>
+      </p:sp>
+      <p:pic>
+        <p:nvPicPr>
+          <p:cNvPr id="5" name="Picture 4" descr="艾伦·麦席森·图灵"/>
+          <p:cNvPicPr/>
           <p:nvPr/>
-        </p:nvSpPr>
-        <p:spPr>
+        </p:nvPicPr>
+        <p:blipFill>
+          <a:blip r:embed="rId3">
+            <a:extLst>
+              <a:ext uri="{28A0092B-C50C-407E-A947-70E740481C1C}">
+                <a14:useLocalDpi xmlns:a14="http://schemas.microsoft.com/office/drawing/2010/main" val="0"/>
+              </a:ext>
+            </a:extLst>
+          </a:blip>
+          <a:srcRect/>
+          <a:stretch>
+            <a:fillRect/>
+          </a:stretch>
+        </p:blipFill>
+        <p:spPr bwMode="auto">
           <a:xfrm>
-            <a:off x="3058406" y="2720907"/>
-            <a:ext cx="2810563" cy="561692"/>
+            <a:off x="1987550" y="914400"/>
+            <a:ext cx="6038849" cy="3460749"/>
           </a:xfrm>
           <a:prstGeom prst="rect">
             <a:avLst/>
           </a:prstGeom>
           <a:noFill/>
+          <a:ln>
+            <a:noFill/>
+          </a:ln>
         </p:spPr>
-        <p:txBody>
-          <a:bodyPr wrap="square" lIns="68580" tIns="34290" rIns="68580" bIns="34290" rtlCol="0">
+      </p:pic>
+      <p:sp>
+        <p:nvSpPr>
+          <p:cNvPr id="7" name="Rectangle 6"/>
+          <p:cNvSpPr/>
+          <p:nvPr/>
+        </p:nvSpPr>
+        <p:spPr>
+          <a:xfrm>
+            <a:off x="5525544" y="4431321"/>
+            <a:ext cx="3057247" cy="307777"/>
+          </a:xfrm>
+          <a:prstGeom prst="rect">
+            <a:avLst/>
+          </a:prstGeom>
+        </p:spPr>
+        <p:txBody>
+          <a:bodyPr wrap="none">
             <a:spAutoFit/>
           </a:bodyPr>
           <a:lstStyle/>
           <a:p>
-            <a:pPr algn="ctr">
-              <a:defRPr/>
-            </a:pPr>
-            <a:r>
-              <a:rPr lang="zh-CN" altLang="en-US" sz="3200" dirty="0">
-                <a:solidFill>
-                  <a:srgbClr val="33495E"/>
-                </a:solidFill>
-                <a:latin typeface="微软雅黑" panose="020B0503020204020204" pitchFamily="34" charset="-122"/>
-                <a:ea typeface="微软雅黑" panose="020B0503020204020204" pitchFamily="34" charset="-122"/>
-                <a:sym typeface="+mn-ea"/>
-              </a:rPr>
-              <a:t>敬请批评指正</a:t>
-            </a:r>
+            <a:r>
+              <a:rPr lang="zh-CN" altLang="en-US" kern="100" dirty="0" smtClean="0">
+                <a:latin typeface="Calibri" panose="020F0502020204030204" pitchFamily="34" charset="0"/>
+                <a:ea typeface="宋体" panose="02010600030101010101" pitchFamily="2" charset="-122"/>
+                <a:cs typeface="Times New Roman" panose="02020603050405020304" pitchFamily="18" charset="0"/>
+              </a:rPr>
+              <a:t>（</a:t>
+            </a:r>
+            <a:r>
+              <a:rPr lang="zh-CN" altLang="en-US" kern="100" dirty="0">
+                <a:ea typeface="黑体" panose="02010609060101010101" pitchFamily="49" charset="-122"/>
+                <a:cs typeface="Times New Roman" panose="02020603050405020304" pitchFamily="18" charset="0"/>
+              </a:rPr>
+              <a:t>思政要素：国家情怀、文化自信</a:t>
+            </a:r>
+            <a:r>
+              <a:rPr lang="zh-CN" altLang="en-US" kern="100" dirty="0" smtClean="0">
+                <a:latin typeface="Calibri" panose="020F0502020204030204" pitchFamily="34" charset="0"/>
+                <a:ea typeface="宋体" panose="02010600030101010101" pitchFamily="2" charset="-122"/>
+                <a:cs typeface="Times New Roman" panose="02020603050405020304" pitchFamily="18" charset="0"/>
+              </a:rPr>
+              <a:t>）</a:t>
+            </a:r>
+            <a:endParaRPr lang="en-US" dirty="0"/>
           </a:p>
         </p:txBody>
       </p:sp>
     </p:spTree>
     <p:extLst>
       <p:ext uri="{BB962C8B-B14F-4D97-AF65-F5344CB8AC3E}">
-        <p14:creationId xmlns:p14="http://schemas.microsoft.com/office/powerpoint/2010/main" val="1427546016"/>
+        <p14:creationId xmlns:p14="http://schemas.microsoft.com/office/powerpoint/2010/main" val="2829445625"/>
       </p:ext>
     </p:extLst>
   </p:cSld>
   <p:clrMapOvr>
     <a:masterClrMapping/>
   </p:clrMapOvr>
-  <mc:AlternateContent xmlns:mc="http://schemas.openxmlformats.org/markup-compatibility/2006" xmlns:p14="http://schemas.microsoft.com/office/powerpoint/2010/main">
-    <mc:Choice Requires="p14">
-      <p:transition spd="slow" p14:dur="900">
-        <p14:warp/>
+  <mc:AlternateContent xmlns:mc="http://schemas.openxmlformats.org/markup-compatibility/2006" xmlns:p15="http://schemas.microsoft.com/office/powerpoint/2012/main">
+    <mc:Choice Requires="p15">
+      <p:transition xmlns:p14="http://schemas.microsoft.com/office/powerpoint/2010/main" spd="slow" p14:dur="1250">
+        <p15:prstTrans prst="peelOff"/>
       </p:transition>
     </mc:Choice>
     <mc:Fallback xmlns="">
@@ -4960,6 +5030,1021 @@
           <a:chExt cx="0" cy="0"/>
         </a:xfrm>
       </p:grpSpPr>
+      <p:pic>
+        <p:nvPicPr>
+          <p:cNvPr id="2" name="Picture 1"/>
+          <p:cNvPicPr>
+            <a:picLocks noChangeAspect="1"/>
+          </p:cNvPicPr>
+          <p:nvPr/>
+        </p:nvPicPr>
+        <p:blipFill rotWithShape="1">
+          <a:blip r:embed="rId3"/>
+          <a:srcRect l="16078" t="8528" r="14488" b="16904"/>
+          <a:stretch/>
+        </p:blipFill>
+        <p:spPr>
+          <a:xfrm rot="20538853">
+            <a:off x="530689" y="2458929"/>
+            <a:ext cx="2495550" cy="2006600"/>
+          </a:xfrm>
+          <a:prstGeom prst="rect">
+            <a:avLst/>
+          </a:prstGeom>
+        </p:spPr>
+      </p:pic>
+      <p:pic>
+        <p:nvPicPr>
+          <p:cNvPr id="1026" name="Picture 2" descr="大脑"/>
+          <p:cNvPicPr>
+            <a:picLocks noChangeAspect="1" noChangeArrowheads="1"/>
+          </p:cNvPicPr>
+          <p:nvPr/>
+        </p:nvPicPr>
+        <p:blipFill>
+          <a:blip r:embed="rId4">
+            <a:extLst>
+              <a:ext uri="{28A0092B-C50C-407E-A947-70E740481C1C}">
+                <a14:useLocalDpi xmlns:a14="http://schemas.microsoft.com/office/drawing/2010/main" val="0"/>
+              </a:ext>
+            </a:extLst>
+          </a:blip>
+          <a:srcRect/>
+          <a:stretch>
+            <a:fillRect/>
+          </a:stretch>
+        </p:blipFill>
+        <p:spPr bwMode="auto">
+          <a:xfrm rot="525433">
+            <a:off x="6559549" y="2468561"/>
+            <a:ext cx="2095500" cy="2095501"/>
+          </a:xfrm>
+          <a:prstGeom prst="rect">
+            <a:avLst/>
+          </a:prstGeom>
+          <a:noFill/>
+          <a:extLst>
+            <a:ext uri="{909E8E84-426E-40DD-AFC4-6F175D3DCCD1}">
+              <a14:hiddenFill xmlns:a14="http://schemas.microsoft.com/office/drawing/2010/main">
+                <a:solidFill>
+                  <a:srgbClr val="FFFFFF"/>
+                </a:solidFill>
+              </a14:hiddenFill>
+            </a:ext>
+          </a:extLst>
+        </p:spPr>
+      </p:pic>
+      <p:sp>
+        <p:nvSpPr>
+          <p:cNvPr id="25" name="文本框 10"/>
+          <p:cNvSpPr txBox="1"/>
+          <p:nvPr/>
+        </p:nvSpPr>
+        <p:spPr>
+          <a:xfrm>
+            <a:off x="580032" y="631513"/>
+            <a:ext cx="3674468" cy="369332"/>
+          </a:xfrm>
+          <a:prstGeom prst="rect">
+            <a:avLst/>
+          </a:prstGeom>
+          <a:noFill/>
+        </p:spPr>
+        <p:txBody>
+          <a:bodyPr wrap="square" rtlCol="0">
+            <a:spAutoFit/>
+          </a:bodyPr>
+          <a:lstStyle/>
+          <a:p>
+            <a:r>
+              <a:rPr lang="zh-CN" altLang="en-US" sz="1800" dirty="0">
+                <a:solidFill>
+                  <a:srgbClr val="33495E"/>
+                </a:solidFill>
+                <a:latin typeface="微软雅黑" panose="020B0503020204020204" pitchFamily="34" charset="-122"/>
+                <a:ea typeface="微软雅黑" panose="020B0503020204020204" pitchFamily="34" charset="-122"/>
+                <a:sym typeface="+mn-ea"/>
+              </a:rPr>
+              <a:t>思辨计算机语言的优缺点</a:t>
+            </a:r>
+          </a:p>
+        </p:txBody>
+      </p:sp>
+      <p:sp>
+        <p:nvSpPr>
+          <p:cNvPr id="3" name="Rectangle 2"/>
+          <p:cNvSpPr/>
+          <p:nvPr/>
+        </p:nvSpPr>
+        <p:spPr>
+          <a:xfrm>
+            <a:off x="1860550" y="903098"/>
+            <a:ext cx="4787900" cy="3724096"/>
+          </a:xfrm>
+          <a:prstGeom prst="rect">
+            <a:avLst/>
+          </a:prstGeom>
+        </p:spPr>
+        <p:txBody>
+          <a:bodyPr wrap="square">
+            <a:spAutoFit/>
+          </a:bodyPr>
+          <a:lstStyle/>
+          <a:p>
+            <a:pPr algn="just">
+              <a:spcBef>
+                <a:spcPts val="600"/>
+              </a:spcBef>
+              <a:spcAft>
+                <a:spcPts val="713"/>
+              </a:spcAft>
+              <a:buClr>
+                <a:srgbClr val="00544A"/>
+              </a:buClr>
+            </a:pPr>
+            <a:r>
+              <a:rPr lang="zh-CN" altLang="en-US" sz="2800" dirty="0">
+                <a:solidFill>
+                  <a:srgbClr val="19B49B"/>
+                </a:solidFill>
+                <a:latin typeface="微软雅黑" panose="020B0503020204020204" pitchFamily="34" charset="-122"/>
+                <a:ea typeface="微软雅黑" panose="020B0503020204020204" pitchFamily="34" charset="-122"/>
+              </a:rPr>
+              <a:t>       </a:t>
+            </a:r>
+            <a:r>
+              <a:rPr lang="zh-CN" altLang="en-US" sz="2600" dirty="0">
+                <a:solidFill>
+                  <a:srgbClr val="19B49B"/>
+                </a:solidFill>
+                <a:latin typeface="微软雅黑" panose="020B0503020204020204" pitchFamily="34" charset="-122"/>
+                <a:ea typeface="微软雅黑" panose="020B0503020204020204" pitchFamily="34" charset="-122"/>
+              </a:rPr>
+              <a:t>业界认为，</a:t>
+            </a:r>
+            <a:r>
+              <a:rPr lang="zh-CN" altLang="en-US" sz="2600" dirty="0" smtClean="0">
+                <a:solidFill>
+                  <a:srgbClr val="19B49B"/>
+                </a:solidFill>
+                <a:latin typeface="微软雅黑" panose="020B0503020204020204" pitchFamily="34" charset="-122"/>
+                <a:ea typeface="微软雅黑" panose="020B0503020204020204" pitchFamily="34" charset="-122"/>
+              </a:rPr>
+              <a:t>计算机语言最</a:t>
+            </a:r>
+            <a:r>
+              <a:rPr lang="zh-CN" altLang="en-US" sz="2600" dirty="0">
+                <a:solidFill>
+                  <a:srgbClr val="19B49B"/>
+                </a:solidFill>
+                <a:latin typeface="微软雅黑" panose="020B0503020204020204" pitchFamily="34" charset="-122"/>
+                <a:ea typeface="微软雅黑" panose="020B0503020204020204" pitchFamily="34" charset="-122"/>
+              </a:rPr>
+              <a:t>能隐喻</a:t>
+            </a:r>
+            <a:r>
+              <a:rPr lang="zh-CN" altLang="en-US" sz="2600" dirty="0" smtClean="0">
+                <a:solidFill>
+                  <a:srgbClr val="19B49B"/>
+                </a:solidFill>
+                <a:latin typeface="微软雅黑" panose="020B0503020204020204" pitchFamily="34" charset="-122"/>
+                <a:ea typeface="微软雅黑" panose="020B0503020204020204" pitchFamily="34" charset="-122"/>
+              </a:rPr>
+              <a:t>人脑语言，</a:t>
+            </a:r>
+            <a:r>
+              <a:rPr lang="zh-CN" altLang="en-US" sz="2600" dirty="0">
+                <a:solidFill>
+                  <a:srgbClr val="19B49B"/>
+                </a:solidFill>
+                <a:latin typeface="微软雅黑" panose="020B0503020204020204" pitchFamily="34" charset="-122"/>
+                <a:ea typeface="微软雅黑" panose="020B0503020204020204" pitchFamily="34" charset="-122"/>
+              </a:rPr>
+              <a:t>但也必须注意到人机隐喻的一些缺陷，例如，计算机是“</a:t>
+            </a:r>
+            <a:r>
+              <a:rPr lang="en-US" altLang="zh-CN" sz="2600" dirty="0">
+                <a:solidFill>
+                  <a:srgbClr val="19B49B"/>
+                </a:solidFill>
+                <a:latin typeface="微软雅黑" panose="020B0503020204020204" pitchFamily="34" charset="-122"/>
+                <a:ea typeface="微软雅黑" panose="020B0503020204020204" pitchFamily="34" charset="-122"/>
+              </a:rPr>
+              <a:t>0/1</a:t>
+            </a:r>
+            <a:r>
+              <a:rPr lang="zh-CN" altLang="en-US" sz="2600" dirty="0">
+                <a:solidFill>
+                  <a:srgbClr val="19B49B"/>
+                </a:solidFill>
+                <a:latin typeface="微软雅黑" panose="020B0503020204020204" pitchFamily="34" charset="-122"/>
+                <a:ea typeface="微软雅黑" panose="020B0503020204020204" pitchFamily="34" charset="-122"/>
+              </a:rPr>
+              <a:t>语言”的二进制电路组成的物性的机器，人是“字符</a:t>
+            </a:r>
+            <a:r>
+              <a:rPr lang="en-US" altLang="zh-CN" sz="2600" dirty="0">
+                <a:solidFill>
+                  <a:srgbClr val="19B49B"/>
+                </a:solidFill>
+                <a:latin typeface="微软雅黑" panose="020B0503020204020204" pitchFamily="34" charset="-122"/>
+                <a:ea typeface="微软雅黑" panose="020B0503020204020204" pitchFamily="34" charset="-122"/>
+              </a:rPr>
+              <a:t>/</a:t>
+            </a:r>
+            <a:r>
+              <a:rPr lang="zh-CN" altLang="en-US" sz="2600" dirty="0">
+                <a:solidFill>
+                  <a:srgbClr val="19B49B"/>
+                </a:solidFill>
+                <a:latin typeface="微软雅黑" panose="020B0503020204020204" pitchFamily="34" charset="-122"/>
+                <a:ea typeface="微软雅黑" panose="020B0503020204020204" pitchFamily="34" charset="-122"/>
+              </a:rPr>
+              <a:t>非字符语言”的神经系统组成的人性的生物体，所以，</a:t>
+            </a:r>
+            <a:r>
+              <a:rPr lang="zh-CN" altLang="en-US" sz="2600" dirty="0" smtClean="0">
+                <a:solidFill>
+                  <a:srgbClr val="19B49B"/>
+                </a:solidFill>
+                <a:latin typeface="微软雅黑" panose="020B0503020204020204" pitchFamily="34" charset="-122"/>
+                <a:ea typeface="微软雅黑" panose="020B0503020204020204" pitchFamily="34" charset="-122"/>
+              </a:rPr>
+              <a:t>“计算机编程语言本质”</a:t>
+            </a:r>
+            <a:r>
+              <a:rPr lang="zh-CN" altLang="en-US" sz="2600" dirty="0">
+                <a:solidFill>
+                  <a:srgbClr val="19B49B"/>
+                </a:solidFill>
+                <a:latin typeface="微软雅黑" panose="020B0503020204020204" pitchFamily="34" charset="-122"/>
+                <a:ea typeface="微软雅黑" panose="020B0503020204020204" pitchFamily="34" charset="-122"/>
+              </a:rPr>
+              <a:t>必须物性与人性统一。</a:t>
+            </a:r>
+            <a:endParaRPr lang="en-US" sz="2600" dirty="0">
+              <a:solidFill>
+                <a:srgbClr val="19B49B"/>
+              </a:solidFill>
+              <a:latin typeface="微软雅黑" panose="020B0503020204020204" pitchFamily="34" charset="-122"/>
+              <a:ea typeface="微软雅黑" panose="020B0503020204020204" pitchFamily="34" charset="-122"/>
+            </a:endParaRPr>
+          </a:p>
+        </p:txBody>
+      </p:sp>
+      <p:sp>
+        <p:nvSpPr>
+          <p:cNvPr id="4" name="Rectangle 3"/>
+          <p:cNvSpPr/>
+          <p:nvPr/>
+        </p:nvSpPr>
+        <p:spPr>
+          <a:xfrm>
+            <a:off x="5493794" y="459528"/>
+            <a:ext cx="3057247" cy="307777"/>
+          </a:xfrm>
+          <a:prstGeom prst="rect">
+            <a:avLst/>
+          </a:prstGeom>
+        </p:spPr>
+        <p:txBody>
+          <a:bodyPr wrap="none">
+            <a:spAutoFit/>
+          </a:bodyPr>
+          <a:lstStyle/>
+          <a:p>
+            <a:r>
+              <a:rPr lang="zh-CN" altLang="en-US" kern="100" dirty="0" smtClean="0">
+                <a:latin typeface="Calibri" panose="020F0502020204030204" pitchFamily="34" charset="0"/>
+                <a:ea typeface="宋体" panose="02010600030101010101" pitchFamily="2" charset="-122"/>
+                <a:cs typeface="Times New Roman" panose="02020603050405020304" pitchFamily="18" charset="0"/>
+              </a:rPr>
+              <a:t>（</a:t>
+            </a:r>
+            <a:r>
+              <a:rPr lang="zh-CN" altLang="en-US" kern="100" dirty="0">
+                <a:ea typeface="黑体" panose="02010609060101010101" pitchFamily="49" charset="-122"/>
+                <a:cs typeface="Times New Roman" panose="02020603050405020304" pitchFamily="18" charset="0"/>
+              </a:rPr>
+              <a:t>思政要素：辩证思辨、</a:t>
+            </a:r>
+            <a:r>
+              <a:rPr lang="zh-CN" altLang="en-US" kern="100" dirty="0" smtClean="0">
+                <a:ea typeface="黑体" panose="02010609060101010101" pitchFamily="49" charset="-122"/>
+                <a:cs typeface="Times New Roman" panose="02020603050405020304" pitchFamily="18" charset="0"/>
+              </a:rPr>
+              <a:t>自主</a:t>
+            </a:r>
+            <a:r>
+              <a:rPr lang="zh-CN" altLang="en-US" kern="100" dirty="0">
+                <a:ea typeface="黑体" panose="02010609060101010101" pitchFamily="49" charset="-122"/>
+                <a:cs typeface="Times New Roman" panose="02020603050405020304" pitchFamily="18" charset="0"/>
+              </a:rPr>
+              <a:t>优化</a:t>
+            </a:r>
+            <a:r>
+              <a:rPr lang="zh-CN" altLang="en-US" kern="100" dirty="0" smtClean="0">
+                <a:latin typeface="Calibri" panose="020F0502020204030204" pitchFamily="34" charset="0"/>
+                <a:ea typeface="宋体" panose="02010600030101010101" pitchFamily="2" charset="-122"/>
+                <a:cs typeface="Times New Roman" panose="02020603050405020304" pitchFamily="18" charset="0"/>
+              </a:rPr>
+              <a:t>）</a:t>
+            </a:r>
+            <a:endParaRPr lang="en-US" dirty="0"/>
+          </a:p>
+        </p:txBody>
+      </p:sp>
+    </p:spTree>
+    <p:extLst>
+      <p:ext uri="{BB962C8B-B14F-4D97-AF65-F5344CB8AC3E}">
+        <p14:creationId xmlns:p14="http://schemas.microsoft.com/office/powerpoint/2010/main" val="309804018"/>
+      </p:ext>
+    </p:extLst>
+  </p:cSld>
+  <p:clrMapOvr>
+    <a:masterClrMapping/>
+  </p:clrMapOvr>
+  <mc:AlternateContent xmlns:mc="http://schemas.openxmlformats.org/markup-compatibility/2006" xmlns:p15="http://schemas.microsoft.com/office/powerpoint/2012/main">
+    <mc:Choice Requires="p15">
+      <p:transition xmlns:p14="http://schemas.microsoft.com/office/powerpoint/2010/main" spd="slow" p14:dur="1250">
+        <p15:prstTrans prst="peelOff"/>
+      </p:transition>
+    </mc:Choice>
+    <mc:Fallback xmlns="">
+      <p:transition spd="slow">
+        <p:fade/>
+      </p:transition>
+    </mc:Fallback>
+  </mc:AlternateContent>
+  <p:timing>
+    <p:tnLst>
+      <p:par>
+        <p:cTn id="1" dur="indefinite" restart="never" nodeType="tmRoot"/>
+      </p:par>
+    </p:tnLst>
+  </p:timing>
+</p:sld>
+</file>
+
+<file path=ppt/slides/slide13.xml><?xml version="1.0" encoding="utf-8"?>
+<p:sld xmlns:a="http://schemas.openxmlformats.org/drawingml/2006/main" xmlns:r="http://schemas.openxmlformats.org/officeDocument/2006/relationships" xmlns:p="http://schemas.openxmlformats.org/presentationml/2006/main">
+  <p:cSld>
+    <p:spTree>
+      <p:nvGrpSpPr>
+        <p:cNvPr id="1" name=""/>
+        <p:cNvGrpSpPr/>
+        <p:nvPr/>
+      </p:nvGrpSpPr>
+      <p:grpSpPr>
+        <a:xfrm>
+          <a:off x="0" y="0"/>
+          <a:ext cx="0" cy="0"/>
+          <a:chOff x="0" y="0"/>
+          <a:chExt cx="0" cy="0"/>
+        </a:xfrm>
+      </p:grpSpPr>
+      <p:sp>
+        <p:nvSpPr>
+          <p:cNvPr id="25" name="文本框 10"/>
+          <p:cNvSpPr txBox="1"/>
+          <p:nvPr/>
+        </p:nvSpPr>
+        <p:spPr>
+          <a:xfrm>
+            <a:off x="580032" y="631513"/>
+            <a:ext cx="3134718" cy="369332"/>
+          </a:xfrm>
+          <a:prstGeom prst="rect">
+            <a:avLst/>
+          </a:prstGeom>
+          <a:noFill/>
+        </p:spPr>
+        <p:txBody>
+          <a:bodyPr wrap="square" rtlCol="0">
+            <a:spAutoFit/>
+          </a:bodyPr>
+          <a:lstStyle/>
+          <a:p>
+            <a:r>
+              <a:rPr lang="zh-CN" altLang="en-US" sz="1800" dirty="0">
+                <a:solidFill>
+                  <a:srgbClr val="33495E"/>
+                </a:solidFill>
+                <a:latin typeface="微软雅黑" panose="020B0503020204020204" pitchFamily="34" charset="-122"/>
+                <a:ea typeface="微软雅黑" panose="020B0503020204020204" pitchFamily="34" charset="-122"/>
+                <a:sym typeface="+mn-ea"/>
+              </a:rPr>
+              <a:t>测验、小结、讲后思考</a:t>
+            </a:r>
+          </a:p>
+        </p:txBody>
+      </p:sp>
+      <p:sp>
+        <p:nvSpPr>
+          <p:cNvPr id="2" name="文本框 1">
+            <a:extLst>
+              <a:ext uri="{FF2B5EF4-FFF2-40B4-BE49-F238E27FC236}">
+                <a16:creationId xmlns="" xmlns:a16="http://schemas.microsoft.com/office/drawing/2014/main" id="{438813D7-676E-4BB1-8BD1-AA790C109740}"/>
+              </a:ext>
+            </a:extLst>
+          </p:cNvPr>
+          <p:cNvSpPr txBox="1"/>
+          <p:nvPr/>
+        </p:nvSpPr>
+        <p:spPr>
+          <a:xfrm>
+            <a:off x="4927600" y="4551431"/>
+            <a:ext cx="3829050" cy="307777"/>
+          </a:xfrm>
+          <a:prstGeom prst="rect">
+            <a:avLst/>
+          </a:prstGeom>
+          <a:noFill/>
+        </p:spPr>
+        <p:txBody>
+          <a:bodyPr wrap="square" rtlCol="0">
+            <a:spAutoFit/>
+          </a:bodyPr>
+          <a:lstStyle/>
+          <a:p>
+            <a:r>
+              <a:rPr lang="zh-CN" altLang="en-US" dirty="0" smtClean="0"/>
+              <a:t>（思政要素：学</a:t>
+            </a:r>
+            <a:r>
+              <a:rPr lang="zh-CN" altLang="en-US" dirty="0"/>
+              <a:t>思结合、知行统一、实事求是）</a:t>
+            </a:r>
+          </a:p>
+        </p:txBody>
+      </p:sp>
+      <p:sp>
+        <p:nvSpPr>
+          <p:cNvPr id="3" name="Rectangle 2"/>
+          <p:cNvSpPr/>
+          <p:nvPr/>
+        </p:nvSpPr>
+        <p:spPr>
+          <a:xfrm>
+            <a:off x="533400" y="1087248"/>
+            <a:ext cx="8223250" cy="3267561"/>
+          </a:xfrm>
+          <a:prstGeom prst="rect">
+            <a:avLst/>
+          </a:prstGeom>
+        </p:spPr>
+        <p:txBody>
+          <a:bodyPr wrap="square">
+            <a:spAutoFit/>
+          </a:bodyPr>
+          <a:lstStyle/>
+          <a:p>
+            <a:pPr algn="just">
+              <a:spcAft>
+                <a:spcPts val="713"/>
+              </a:spcAft>
+              <a:buClr>
+                <a:srgbClr val="00544A"/>
+              </a:buClr>
+            </a:pPr>
+            <a:r>
+              <a:rPr lang="zh-CN" altLang="en-US" sz="3500" b="1" dirty="0" smtClean="0">
+                <a:solidFill>
+                  <a:srgbClr val="19B49B"/>
+                </a:solidFill>
+                <a:latin typeface="微软雅黑" panose="020B0503020204020204" pitchFamily="34" charset="-122"/>
+                <a:ea typeface="微软雅黑" panose="020B0503020204020204" pitchFamily="34" charset="-122"/>
+              </a:rPr>
+              <a:t>关于计算机语言的说法错误的是：</a:t>
+            </a:r>
+            <a:endParaRPr lang="en-US" altLang="zh-CN" sz="3500" b="1" dirty="0">
+              <a:solidFill>
+                <a:srgbClr val="19B49B"/>
+              </a:solidFill>
+              <a:latin typeface="微软雅黑" panose="020B0503020204020204" pitchFamily="34" charset="-122"/>
+              <a:ea typeface="微软雅黑" panose="020B0503020204020204" pitchFamily="34" charset="-122"/>
+            </a:endParaRPr>
+          </a:p>
+          <a:p>
+            <a:pPr marL="339528" indent="-339528" algn="just">
+              <a:spcBef>
+                <a:spcPts val="600"/>
+              </a:spcBef>
+              <a:spcAft>
+                <a:spcPts val="713"/>
+              </a:spcAft>
+              <a:buClr>
+                <a:srgbClr val="00544A"/>
+              </a:buClr>
+              <a:buFont typeface="Wingdings" panose="05000000000000000000" pitchFamily="2" charset="2"/>
+              <a:buChar char="Ø"/>
+            </a:pPr>
+            <a:r>
+              <a:rPr lang="en-US" altLang="zh-CN" sz="2300" dirty="0" smtClean="0">
+                <a:solidFill>
+                  <a:srgbClr val="00B050"/>
+                </a:solidFill>
+                <a:latin typeface="微软雅黑" panose="020B0503020204020204" pitchFamily="34" charset="-122"/>
+                <a:ea typeface="微软雅黑" panose="020B0503020204020204" pitchFamily="34" charset="-122"/>
+              </a:rPr>
+              <a:t>A</a:t>
+            </a:r>
+            <a:r>
+              <a:rPr lang="zh-CN" altLang="en-US" sz="2300" dirty="0" smtClean="0">
+                <a:solidFill>
+                  <a:srgbClr val="00B050"/>
+                </a:solidFill>
+                <a:latin typeface="微软雅黑" panose="020B0503020204020204" pitchFamily="34" charset="-122"/>
+                <a:ea typeface="微软雅黑" panose="020B0503020204020204" pitchFamily="34" charset="-122"/>
+              </a:rPr>
+              <a:t>．</a:t>
+            </a:r>
+            <a:r>
+              <a:rPr lang="zh-CN" altLang="en-US" sz="2300" dirty="0">
+                <a:solidFill>
+                  <a:srgbClr val="00B050"/>
+                </a:solidFill>
+                <a:latin typeface="微软雅黑" panose="020B0503020204020204" pitchFamily="34" charset="-122"/>
+                <a:ea typeface="微软雅黑" panose="020B0503020204020204" pitchFamily="34" charset="-122"/>
+              </a:rPr>
+              <a:t>本质是“计算机</a:t>
+            </a:r>
+            <a:r>
+              <a:rPr lang="en-US" altLang="zh-CN" sz="2300" dirty="0">
+                <a:solidFill>
+                  <a:srgbClr val="00B050"/>
+                </a:solidFill>
+                <a:latin typeface="微软雅黑" panose="020B0503020204020204" pitchFamily="34" charset="-122"/>
+                <a:ea typeface="微软雅黑" panose="020B0503020204020204" pitchFamily="34" charset="-122"/>
+              </a:rPr>
+              <a:t>CPU</a:t>
+            </a:r>
+            <a:r>
+              <a:rPr lang="zh-CN" altLang="en-US" sz="2300" dirty="0">
+                <a:solidFill>
+                  <a:srgbClr val="00B050"/>
+                </a:solidFill>
+                <a:latin typeface="微软雅黑" panose="020B0503020204020204" pitchFamily="34" charset="-122"/>
+                <a:ea typeface="微软雅黑" panose="020B0503020204020204" pitchFamily="34" charset="-122"/>
+              </a:rPr>
+              <a:t>平台的</a:t>
+            </a:r>
+            <a:r>
+              <a:rPr lang="en-US" altLang="zh-CN" sz="2300" dirty="0">
+                <a:solidFill>
+                  <a:srgbClr val="00B050"/>
+                </a:solidFill>
+                <a:latin typeface="微软雅黑" panose="020B0503020204020204" pitchFamily="34" charset="-122"/>
+                <a:ea typeface="微软雅黑" panose="020B0503020204020204" pitchFamily="34" charset="-122"/>
+              </a:rPr>
+              <a:t>0/1</a:t>
+            </a:r>
+            <a:r>
+              <a:rPr lang="zh-CN" altLang="en-US" sz="2300" dirty="0">
+                <a:solidFill>
+                  <a:srgbClr val="00B050"/>
+                </a:solidFill>
+                <a:latin typeface="微软雅黑" panose="020B0503020204020204" pitchFamily="34" charset="-122"/>
+                <a:ea typeface="微软雅黑" panose="020B0503020204020204" pitchFamily="34" charset="-122"/>
+              </a:rPr>
+              <a:t>的语言”隐喻“人脑平台的字符</a:t>
+            </a:r>
+            <a:r>
+              <a:rPr lang="en-US" altLang="zh-CN" sz="2300" dirty="0">
+                <a:solidFill>
+                  <a:srgbClr val="00B050"/>
+                </a:solidFill>
+                <a:latin typeface="微软雅黑" panose="020B0503020204020204" pitchFamily="34" charset="-122"/>
+                <a:ea typeface="微软雅黑" panose="020B0503020204020204" pitchFamily="34" charset="-122"/>
+              </a:rPr>
+              <a:t>/</a:t>
+            </a:r>
+            <a:r>
+              <a:rPr lang="zh-CN" altLang="en-US" sz="2300" dirty="0">
+                <a:solidFill>
+                  <a:srgbClr val="00B050"/>
+                </a:solidFill>
+                <a:latin typeface="微软雅黑" panose="020B0503020204020204" pitchFamily="34" charset="-122"/>
+                <a:ea typeface="微软雅黑" panose="020B0503020204020204" pitchFamily="34" charset="-122"/>
+              </a:rPr>
+              <a:t>非字符的语言”。</a:t>
+            </a:r>
+            <a:endParaRPr lang="en-US" altLang="zh-CN" sz="2300" dirty="0" smtClean="0">
+              <a:solidFill>
+                <a:srgbClr val="00B050"/>
+              </a:solidFill>
+              <a:latin typeface="微软雅黑" panose="020B0503020204020204" pitchFamily="34" charset="-122"/>
+              <a:ea typeface="微软雅黑" panose="020B0503020204020204" pitchFamily="34" charset="-122"/>
+            </a:endParaRPr>
+          </a:p>
+          <a:p>
+            <a:pPr marL="339528" indent="-339528" algn="just">
+              <a:spcBef>
+                <a:spcPts val="600"/>
+              </a:spcBef>
+              <a:spcAft>
+                <a:spcPts val="713"/>
+              </a:spcAft>
+              <a:buClr>
+                <a:srgbClr val="00544A"/>
+              </a:buClr>
+              <a:buFont typeface="Wingdings" panose="05000000000000000000" pitchFamily="2" charset="2"/>
+              <a:buChar char="Ø"/>
+            </a:pPr>
+            <a:r>
+              <a:rPr lang="en-US" altLang="zh-CN" sz="2300" dirty="0" smtClean="0">
+                <a:solidFill>
+                  <a:srgbClr val="00B050"/>
+                </a:solidFill>
+                <a:latin typeface="微软雅黑" panose="020B0503020204020204" pitchFamily="34" charset="-122"/>
+                <a:ea typeface="微软雅黑" panose="020B0503020204020204" pitchFamily="34" charset="-122"/>
+              </a:rPr>
+              <a:t>B</a:t>
+            </a:r>
+            <a:r>
+              <a:rPr lang="zh-CN" altLang="en-US" sz="2300" dirty="0" smtClean="0">
+                <a:solidFill>
+                  <a:srgbClr val="00B050"/>
+                </a:solidFill>
+                <a:latin typeface="微软雅黑" panose="020B0503020204020204" pitchFamily="34" charset="-122"/>
+                <a:ea typeface="微软雅黑" panose="020B0503020204020204" pitchFamily="34" charset="-122"/>
+              </a:rPr>
+              <a:t>．与人类语言基本无关。</a:t>
+            </a:r>
+            <a:endParaRPr lang="zh-CN" altLang="en-US" sz="2300" dirty="0">
+              <a:solidFill>
+                <a:srgbClr val="00B050"/>
+              </a:solidFill>
+              <a:latin typeface="微软雅黑" panose="020B0503020204020204" pitchFamily="34" charset="-122"/>
+              <a:ea typeface="微软雅黑" panose="020B0503020204020204" pitchFamily="34" charset="-122"/>
+            </a:endParaRPr>
+          </a:p>
+          <a:p>
+            <a:pPr marL="339528" indent="-339528" algn="just">
+              <a:spcAft>
+                <a:spcPts val="713"/>
+              </a:spcAft>
+              <a:buClr>
+                <a:srgbClr val="00544A"/>
+              </a:buClr>
+              <a:buFont typeface="Wingdings" panose="05000000000000000000" pitchFamily="2" charset="2"/>
+              <a:buChar char="Ø"/>
+            </a:pPr>
+            <a:r>
+              <a:rPr lang="en-US" altLang="zh-CN" sz="2300" dirty="0">
+                <a:solidFill>
+                  <a:srgbClr val="00B050"/>
+                </a:solidFill>
+                <a:latin typeface="微软雅黑" panose="020B0503020204020204" pitchFamily="34" charset="-122"/>
+                <a:ea typeface="微软雅黑" panose="020B0503020204020204" pitchFamily="34" charset="-122"/>
+              </a:rPr>
+              <a:t>C</a:t>
+            </a:r>
+            <a:r>
+              <a:rPr lang="zh-CN" altLang="en-US" sz="2300" dirty="0">
+                <a:solidFill>
+                  <a:srgbClr val="00B050"/>
+                </a:solidFill>
+                <a:latin typeface="微软雅黑" panose="020B0503020204020204" pitchFamily="34" charset="-122"/>
+                <a:ea typeface="微软雅黑" panose="020B0503020204020204" pitchFamily="34" charset="-122"/>
+              </a:rPr>
+              <a:t>．计算机</a:t>
+            </a:r>
+            <a:r>
+              <a:rPr lang="zh-CN" altLang="en-US" sz="2300" dirty="0" smtClean="0">
+                <a:solidFill>
+                  <a:srgbClr val="00B050"/>
+                </a:solidFill>
+                <a:latin typeface="微软雅黑" panose="020B0503020204020204" pitchFamily="34" charset="-122"/>
+                <a:ea typeface="微软雅黑" panose="020B0503020204020204" pitchFamily="34" charset="-122"/>
+              </a:rPr>
+              <a:t>语言代码保存成为文件，然后可在</a:t>
+            </a:r>
+            <a:r>
+              <a:rPr lang="en-US" altLang="zh-CN" sz="2300" dirty="0" smtClean="0">
+                <a:solidFill>
+                  <a:srgbClr val="00B050"/>
+                </a:solidFill>
+                <a:latin typeface="微软雅黑" panose="020B0503020204020204" pitchFamily="34" charset="-122"/>
+                <a:ea typeface="微软雅黑" panose="020B0503020204020204" pitchFamily="34" charset="-122"/>
+              </a:rPr>
+              <a:t>CPU</a:t>
+            </a:r>
+            <a:r>
+              <a:rPr lang="zh-CN" altLang="en-US" sz="2300" dirty="0" smtClean="0">
+                <a:solidFill>
+                  <a:srgbClr val="00B050"/>
+                </a:solidFill>
+                <a:latin typeface="微软雅黑" panose="020B0503020204020204" pitchFamily="34" charset="-122"/>
+                <a:ea typeface="微软雅黑" panose="020B0503020204020204" pitchFamily="34" charset="-122"/>
+              </a:rPr>
+              <a:t>中运行。</a:t>
+            </a:r>
+            <a:endParaRPr lang="en-US" altLang="zh-CN" sz="2300" dirty="0" smtClean="0">
+              <a:solidFill>
+                <a:srgbClr val="00B050"/>
+              </a:solidFill>
+              <a:latin typeface="微软雅黑" panose="020B0503020204020204" pitchFamily="34" charset="-122"/>
+              <a:ea typeface="微软雅黑" panose="020B0503020204020204" pitchFamily="34" charset="-122"/>
+            </a:endParaRPr>
+          </a:p>
+          <a:p>
+            <a:pPr marL="339528" indent="-339528" algn="just">
+              <a:spcAft>
+                <a:spcPts val="713"/>
+              </a:spcAft>
+              <a:buClr>
+                <a:srgbClr val="00544A"/>
+              </a:buClr>
+              <a:buFont typeface="Wingdings" panose="05000000000000000000" pitchFamily="2" charset="2"/>
+              <a:buChar char="Ø"/>
+            </a:pPr>
+            <a:r>
+              <a:rPr lang="en-US" altLang="zh-CN" sz="2300" dirty="0" smtClean="0">
+                <a:solidFill>
+                  <a:srgbClr val="00B050"/>
+                </a:solidFill>
+                <a:latin typeface="微软雅黑" panose="020B0503020204020204" pitchFamily="34" charset="-122"/>
+                <a:ea typeface="微软雅黑" panose="020B0503020204020204" pitchFamily="34" charset="-122"/>
+              </a:rPr>
+              <a:t>D</a:t>
+            </a:r>
+            <a:r>
+              <a:rPr lang="zh-CN" altLang="en-US" sz="2300" dirty="0" smtClean="0">
+                <a:solidFill>
+                  <a:srgbClr val="00B050"/>
+                </a:solidFill>
+                <a:latin typeface="微软雅黑" panose="020B0503020204020204" pitchFamily="34" charset="-122"/>
+                <a:ea typeface="微软雅黑" panose="020B0503020204020204" pitchFamily="34" charset="-122"/>
+              </a:rPr>
+              <a:t>．学术领域认为计算机语言包含“</a:t>
+            </a:r>
+            <a:r>
+              <a:rPr lang="en-US" altLang="zh-CN" sz="2300" dirty="0">
+                <a:solidFill>
+                  <a:srgbClr val="00B050"/>
+                </a:solidFill>
+                <a:latin typeface="微软雅黑" panose="020B0503020204020204" pitchFamily="34" charset="-122"/>
+                <a:ea typeface="微软雅黑" panose="020B0503020204020204" pitchFamily="34" charset="-122"/>
+              </a:rPr>
+              <a:t>C--(ASM)</a:t>
+            </a:r>
+            <a:r>
+              <a:rPr lang="zh-CN" altLang="en-US" sz="2300" dirty="0">
+                <a:solidFill>
+                  <a:srgbClr val="00B050"/>
+                </a:solidFill>
+                <a:latin typeface="微软雅黑" panose="020B0503020204020204" pitchFamily="34" charset="-122"/>
+                <a:ea typeface="微软雅黑" panose="020B0503020204020204" pitchFamily="34" charset="-122"/>
+              </a:rPr>
+              <a:t>、</a:t>
+            </a:r>
+            <a:r>
+              <a:rPr lang="en-US" altLang="zh-CN" sz="2300" dirty="0">
+                <a:solidFill>
+                  <a:srgbClr val="00B050"/>
+                </a:solidFill>
+                <a:latin typeface="微软雅黑" panose="020B0503020204020204" pitchFamily="34" charset="-122"/>
+                <a:ea typeface="微软雅黑" panose="020B0503020204020204" pitchFamily="34" charset="-122"/>
+              </a:rPr>
+              <a:t>C</a:t>
+            </a:r>
+            <a:r>
+              <a:rPr lang="zh-CN" altLang="en-US" sz="2300" dirty="0">
+                <a:solidFill>
+                  <a:srgbClr val="00B050"/>
+                </a:solidFill>
+                <a:latin typeface="微软雅黑" panose="020B0503020204020204" pitchFamily="34" charset="-122"/>
+                <a:ea typeface="微软雅黑" panose="020B0503020204020204" pitchFamily="34" charset="-122"/>
+              </a:rPr>
+              <a:t>、</a:t>
+            </a:r>
+            <a:r>
+              <a:rPr lang="en-US" altLang="zh-CN" sz="2300" dirty="0">
+                <a:solidFill>
+                  <a:srgbClr val="00B050"/>
+                </a:solidFill>
+                <a:latin typeface="微软雅黑" panose="020B0503020204020204" pitchFamily="34" charset="-122"/>
+                <a:ea typeface="微软雅黑" panose="020B0503020204020204" pitchFamily="34" charset="-122"/>
+              </a:rPr>
+              <a:t>C++</a:t>
+            </a:r>
+            <a:r>
+              <a:rPr lang="zh-CN" altLang="en-US" sz="2300" dirty="0">
+                <a:solidFill>
+                  <a:srgbClr val="00B050"/>
+                </a:solidFill>
+                <a:latin typeface="微软雅黑" panose="020B0503020204020204" pitchFamily="34" charset="-122"/>
+                <a:ea typeface="微软雅黑" panose="020B0503020204020204" pitchFamily="34" charset="-122"/>
+              </a:rPr>
+              <a:t>、</a:t>
+            </a:r>
+            <a:r>
+              <a:rPr lang="en-US" altLang="zh-CN" sz="2300" dirty="0">
+                <a:solidFill>
+                  <a:srgbClr val="00B050"/>
+                </a:solidFill>
+                <a:latin typeface="微软雅黑" panose="020B0503020204020204" pitchFamily="34" charset="-122"/>
+                <a:ea typeface="微软雅黑" panose="020B0503020204020204" pitchFamily="34" charset="-122"/>
+              </a:rPr>
+              <a:t>C++++(C#)</a:t>
+            </a:r>
+            <a:r>
+              <a:rPr lang="zh-CN" altLang="en-US" sz="2300" dirty="0" smtClean="0">
+                <a:solidFill>
+                  <a:srgbClr val="00B050"/>
+                </a:solidFill>
+                <a:latin typeface="微软雅黑" panose="020B0503020204020204" pitchFamily="34" charset="-122"/>
+                <a:ea typeface="微软雅黑" panose="020B0503020204020204" pitchFamily="34" charset="-122"/>
+              </a:rPr>
+              <a:t>”四个平台层次。</a:t>
+            </a:r>
+            <a:endParaRPr lang="zh-CN" altLang="en-US" sz="2300" dirty="0">
+              <a:solidFill>
+                <a:srgbClr val="00B050"/>
+              </a:solidFill>
+              <a:latin typeface="微软雅黑" panose="020B0503020204020204" pitchFamily="34" charset="-122"/>
+              <a:ea typeface="微软雅黑" panose="020B0503020204020204" pitchFamily="34" charset="-122"/>
+            </a:endParaRPr>
+          </a:p>
+        </p:txBody>
+      </p:sp>
+    </p:spTree>
+    <p:extLst>
+      <p:ext uri="{BB962C8B-B14F-4D97-AF65-F5344CB8AC3E}">
+        <p14:creationId xmlns:p14="http://schemas.microsoft.com/office/powerpoint/2010/main" val="4054709148"/>
+      </p:ext>
+    </p:extLst>
+  </p:cSld>
+  <p:clrMapOvr>
+    <a:masterClrMapping/>
+  </p:clrMapOvr>
+  <mc:AlternateContent xmlns:mc="http://schemas.openxmlformats.org/markup-compatibility/2006" xmlns:p15="http://schemas.microsoft.com/office/powerpoint/2012/main">
+    <mc:Choice Requires="p15">
+      <p:transition xmlns:p14="http://schemas.microsoft.com/office/powerpoint/2010/main" spd="slow" p14:dur="1250">
+        <p15:prstTrans prst="peelOff"/>
+      </p:transition>
+    </mc:Choice>
+    <mc:Fallback xmlns="">
+      <p:transition spd="slow">
+        <p:fade/>
+      </p:transition>
+    </mc:Fallback>
+  </mc:AlternateContent>
+  <p:timing>
+    <p:tnLst>
+      <p:par>
+        <p:cTn id="1" dur="indefinite" restart="never" nodeType="tmRoot"/>
+      </p:par>
+    </p:tnLst>
+  </p:timing>
+</p:sld>
+</file>
+
+<file path=ppt/slides/slide14.xml><?xml version="1.0" encoding="utf-8"?>
+<p:sld xmlns:a="http://schemas.openxmlformats.org/drawingml/2006/main" xmlns:r="http://schemas.openxmlformats.org/officeDocument/2006/relationships" xmlns:p="http://schemas.openxmlformats.org/presentationml/2006/main">
+  <p:cSld>
+    <p:spTree>
+      <p:nvGrpSpPr>
+        <p:cNvPr id="1" name=""/>
+        <p:cNvGrpSpPr/>
+        <p:nvPr/>
+      </p:nvGrpSpPr>
+      <p:grpSpPr>
+        <a:xfrm>
+          <a:off x="0" y="0"/>
+          <a:ext cx="0" cy="0"/>
+          <a:chOff x="0" y="0"/>
+          <a:chExt cx="0" cy="0"/>
+        </a:xfrm>
+      </p:grpSpPr>
+      <p:sp>
+        <p:nvSpPr>
+          <p:cNvPr id="10" name="文本框 9"/>
+          <p:cNvSpPr txBox="1"/>
+          <p:nvPr/>
+        </p:nvSpPr>
+        <p:spPr>
+          <a:xfrm>
+            <a:off x="2435781" y="1245349"/>
+            <a:ext cx="4272439" cy="1177245"/>
+          </a:xfrm>
+          <a:prstGeom prst="rect">
+            <a:avLst/>
+          </a:prstGeom>
+          <a:noFill/>
+        </p:spPr>
+        <p:txBody>
+          <a:bodyPr wrap="square" lIns="68580" tIns="34290" rIns="68580" bIns="34290" rtlCol="0">
+            <a:spAutoFit/>
+          </a:bodyPr>
+          <a:lstStyle/>
+          <a:p>
+            <a:pPr algn="ctr">
+              <a:defRPr/>
+            </a:pPr>
+            <a:r>
+              <a:rPr lang="en-US" altLang="zh-CN" sz="7200" dirty="0">
+                <a:solidFill>
+                  <a:srgbClr val="33495E"/>
+                </a:solidFill>
+                <a:latin typeface="微软雅黑" panose="020B0503020204020204" pitchFamily="34" charset="-122"/>
+                <a:ea typeface="微软雅黑" panose="020B0503020204020204" pitchFamily="34" charset="-122"/>
+                <a:sym typeface="+mn-ea"/>
+              </a:rPr>
+              <a:t>THANKS</a:t>
+            </a:r>
+          </a:p>
+        </p:txBody>
+      </p:sp>
+      <p:sp>
+        <p:nvSpPr>
+          <p:cNvPr id="2" name="文本框 1"/>
+          <p:cNvSpPr txBox="1"/>
+          <p:nvPr/>
+        </p:nvSpPr>
+        <p:spPr>
+          <a:xfrm>
+            <a:off x="3058406" y="2720907"/>
+            <a:ext cx="2810563" cy="561692"/>
+          </a:xfrm>
+          <a:prstGeom prst="rect">
+            <a:avLst/>
+          </a:prstGeom>
+          <a:noFill/>
+        </p:spPr>
+        <p:txBody>
+          <a:bodyPr wrap="square" lIns="68580" tIns="34290" rIns="68580" bIns="34290" rtlCol="0">
+            <a:spAutoFit/>
+          </a:bodyPr>
+          <a:lstStyle/>
+          <a:p>
+            <a:pPr algn="ctr">
+              <a:defRPr/>
+            </a:pPr>
+            <a:r>
+              <a:rPr lang="zh-CN" altLang="en-US" sz="3200" dirty="0">
+                <a:solidFill>
+                  <a:srgbClr val="33495E"/>
+                </a:solidFill>
+                <a:latin typeface="微软雅黑" panose="020B0503020204020204" pitchFamily="34" charset="-122"/>
+                <a:ea typeface="微软雅黑" panose="020B0503020204020204" pitchFamily="34" charset="-122"/>
+                <a:sym typeface="+mn-ea"/>
+              </a:rPr>
+              <a:t>敬请批评指正</a:t>
+            </a:r>
+          </a:p>
+        </p:txBody>
+      </p:sp>
+    </p:spTree>
+    <p:extLst>
+      <p:ext uri="{BB962C8B-B14F-4D97-AF65-F5344CB8AC3E}">
+        <p14:creationId xmlns:p14="http://schemas.microsoft.com/office/powerpoint/2010/main" val="1427546016"/>
+      </p:ext>
+    </p:extLst>
+  </p:cSld>
+  <p:clrMapOvr>
+    <a:masterClrMapping/>
+  </p:clrMapOvr>
+  <mc:AlternateContent xmlns:mc="http://schemas.openxmlformats.org/markup-compatibility/2006" xmlns:p14="http://schemas.microsoft.com/office/powerpoint/2010/main">
+    <mc:Choice Requires="p14">
+      <p:transition spd="slow" p14:dur="900">
+        <p14:warp/>
+      </p:transition>
+    </mc:Choice>
+    <mc:Fallback xmlns="">
+      <p:transition spd="slow">
+        <p:fade/>
+      </p:transition>
+    </mc:Fallback>
+  </mc:AlternateContent>
+  <p:timing>
+    <p:tnLst>
+      <p:par>
+        <p:cTn id="1" dur="indefinite" restart="never" nodeType="tmRoot"/>
+      </p:par>
+    </p:tnLst>
+  </p:timing>
+</p:sld>
+</file>
+
+<file path=ppt/slides/slide15.xml><?xml version="1.0" encoding="utf-8"?>
+<p:sld xmlns:a="http://schemas.openxmlformats.org/drawingml/2006/main" xmlns:r="http://schemas.openxmlformats.org/officeDocument/2006/relationships" xmlns:p="http://schemas.openxmlformats.org/presentationml/2006/main">
+  <p:cSld>
+    <p:spTree>
+      <p:nvGrpSpPr>
+        <p:cNvPr id="1" name=""/>
+        <p:cNvGrpSpPr/>
+        <p:nvPr/>
+      </p:nvGrpSpPr>
+      <p:grpSpPr>
+        <a:xfrm>
+          <a:off x="0" y="0"/>
+          <a:ext cx="0" cy="0"/>
+          <a:chOff x="0" y="0"/>
+          <a:chExt cx="0" cy="0"/>
+        </a:xfrm>
+      </p:grpSpPr>
       <p:graphicFrame>
         <p:nvGraphicFramePr>
           <p:cNvPr id="2" name="Object 1"/>
@@ -4982,7 +6067,7 @@
           <a:graphicData uri="http://schemas.openxmlformats.org/presentationml/2006/ole">
             <mc:AlternateContent xmlns:mc="http://schemas.openxmlformats.org/markup-compatibility/2006">
               <mc:Choice xmlns:v="urn:schemas-microsoft-com:vml" Requires="v">
-                <p:oleObj spid="_x0000_s4100" name="Picture" r:id="rId3" imgW="2441520" imgH="3979440" progId="Word.Picture.8">
+                <p:oleObj spid="_x0000_s4113" name="Picture" r:id="rId3" imgW="2441520" imgH="3979440" progId="Word.Picture.8">
                   <p:embed/>
                 </p:oleObj>
               </mc:Choice>
@@ -5130,8 +6215,8 @@
         </p:blipFill>
         <p:spPr bwMode="auto">
           <a:xfrm>
-            <a:off x="241300" y="222250"/>
-            <a:ext cx="8674099" cy="4629924"/>
+            <a:off x="203200" y="242788"/>
+            <a:ext cx="8674099" cy="4368800"/>
           </a:xfrm>
           <a:prstGeom prst="rect">
             <a:avLst/>
@@ -5166,6 +6251,54 @@
           </a:extLst>
         </p:spPr>
       </p:pic>
+      <p:sp>
+        <p:nvSpPr>
+          <p:cNvPr id="3" name="Rectangle 2"/>
+          <p:cNvSpPr/>
+          <p:nvPr/>
+        </p:nvSpPr>
+        <p:spPr>
+          <a:xfrm>
+            <a:off x="5689951" y="4611588"/>
+            <a:ext cx="3057247" cy="307777"/>
+          </a:xfrm>
+          <a:prstGeom prst="rect">
+            <a:avLst/>
+          </a:prstGeom>
+        </p:spPr>
+        <p:txBody>
+          <a:bodyPr wrap="none">
+            <a:spAutoFit/>
+          </a:bodyPr>
+          <a:lstStyle/>
+          <a:p>
+            <a:r>
+              <a:rPr lang="zh-CN" altLang="en-US" kern="100" dirty="0" smtClean="0">
+                <a:latin typeface="Calibri" panose="020F0502020204030204" pitchFamily="34" charset="0"/>
+                <a:ea typeface="宋体" panose="02010600030101010101" pitchFamily="2" charset="-122"/>
+                <a:cs typeface="Times New Roman" panose="02020603050405020304" pitchFamily="18" charset="0"/>
+              </a:rPr>
+              <a:t>（</a:t>
+            </a:r>
+            <a:r>
+              <a:rPr lang="zh-CN" altLang="en-US" kern="100" dirty="0">
+                <a:ea typeface="黑体" panose="02010609060101010101" pitchFamily="49" charset="-122"/>
+                <a:cs typeface="Times New Roman" panose="02020603050405020304" pitchFamily="18" charset="0"/>
+              </a:rPr>
+              <a:t>思政要素：学习兴趣、国家情怀</a:t>
+            </a:r>
+            <a:r>
+              <a:rPr lang="zh-CN" altLang="en-US" kern="100" dirty="0">
+                <a:latin typeface="Calibri" panose="020F0502020204030204" pitchFamily="34" charset="0"/>
+                <a:ea typeface="宋体" panose="02010600030101010101" pitchFamily="2" charset="-122"/>
+                <a:cs typeface="Times New Roman" panose="02020603050405020304" pitchFamily="18" charset="0"/>
+              </a:rPr>
+              <a:t>）</a:t>
+            </a:r>
+            <a:endParaRPr lang="en-US" dirty="0"/>
+          </a:p>
+        </p:txBody>
+      </p:sp>
     </p:spTree>
     <p:extLst>
       <p:ext uri="{BB962C8B-B14F-4D97-AF65-F5344CB8AC3E}">
@@ -5698,7 +6831,7 @@
           <a:graphicData uri="http://schemas.openxmlformats.org/presentationml/2006/ole">
             <mc:AlternateContent xmlns:mc="http://schemas.openxmlformats.org/markup-compatibility/2006">
               <mc:Choice xmlns:v="urn:schemas-microsoft-com:vml" Requires="v">
-                <p:oleObj spid="_x0000_s2068" name="Picture" r:id="rId4" imgW="2441520" imgH="3979440" progId="Word.Picture.8">
+                <p:oleObj spid="_x0000_s2081" name="Picture" r:id="rId4" imgW="2441520" imgH="3979440" progId="Word.Picture.8">
                   <p:embed/>
                 </p:oleObj>
               </mc:Choice>
@@ -5760,7 +6893,7 @@
         </p:blipFill>
         <p:spPr>
           <a:xfrm>
-            <a:off x="5722849" y="742833"/>
+            <a:off x="5722849" y="730133"/>
             <a:ext cx="2381372" cy="3968954"/>
           </a:xfrm>
           <a:prstGeom prst="rect">
@@ -5768,6 +6901,53 @@
           </a:prstGeom>
         </p:spPr>
       </p:pic>
+      <p:sp>
+        <p:nvSpPr>
+          <p:cNvPr id="2" name="Rectangle 1"/>
+          <p:cNvSpPr/>
+          <p:nvPr/>
+        </p:nvSpPr>
+        <p:spPr>
+          <a:xfrm>
+            <a:off x="4470400" y="4594288"/>
+            <a:ext cx="4572000" cy="307777"/>
+          </a:xfrm>
+          <a:prstGeom prst="rect">
+            <a:avLst/>
+          </a:prstGeom>
+        </p:spPr>
+        <p:txBody>
+          <a:bodyPr>
+            <a:spAutoFit/>
+          </a:bodyPr>
+          <a:lstStyle/>
+          <a:p>
+            <a:r>
+              <a:rPr lang="zh-CN" altLang="en-US" kern="100" dirty="0" smtClean="0">
+                <a:latin typeface="Calibri" panose="020F0502020204030204" pitchFamily="34" charset="0"/>
+                <a:ea typeface="宋体" panose="02010600030101010101" pitchFamily="2" charset="-122"/>
+                <a:cs typeface="Times New Roman" panose="02020603050405020304" pitchFamily="18" charset="0"/>
+              </a:rPr>
+              <a:t>（</a:t>
+            </a:r>
+            <a:r>
+              <a:rPr lang="zh-CN" altLang="en-US" kern="100" dirty="0">
+                <a:ea typeface="黑体" panose="02010609060101010101" pitchFamily="49" charset="-122"/>
+                <a:cs typeface="Times New Roman" panose="02020603050405020304" pitchFamily="18" charset="0"/>
+              </a:rPr>
+              <a:t>思政要素：正确认识问题、分析问题、</a:t>
+            </a:r>
+            <a:r>
+              <a:rPr lang="zh-CN" altLang="en-US" kern="100" dirty="0" smtClean="0">
+                <a:ea typeface="黑体" panose="02010609060101010101" pitchFamily="49" charset="-122"/>
+                <a:cs typeface="Times New Roman" panose="02020603050405020304" pitchFamily="18" charset="0"/>
+              </a:rPr>
+              <a:t>解决问题）</a:t>
+            </a:r>
+            <a:endParaRPr lang="en-US" dirty="0"/>
+          </a:p>
+        </p:txBody>
+      </p:sp>
     </p:spTree>
     <p:extLst>
       <p:ext uri="{BB962C8B-B14F-4D97-AF65-F5344CB8AC3E}">
@@ -6340,6 +7520,54 @@
               <a:latin typeface="微软雅黑" panose="020B0503020204020204" pitchFamily="34" charset="-122"/>
               <a:ea typeface="微软雅黑" panose="020B0503020204020204" pitchFamily="34" charset="-122"/>
             </a:endParaRPr>
+          </a:p>
+        </p:txBody>
+      </p:sp>
+      <p:sp>
+        <p:nvSpPr>
+          <p:cNvPr id="2" name="Rectangle 1"/>
+          <p:cNvSpPr/>
+          <p:nvPr/>
+        </p:nvSpPr>
+        <p:spPr>
+          <a:xfrm>
+            <a:off x="5633494" y="4394039"/>
+            <a:ext cx="3057247" cy="307777"/>
+          </a:xfrm>
+          <a:prstGeom prst="rect">
+            <a:avLst/>
+          </a:prstGeom>
+        </p:spPr>
+        <p:txBody>
+          <a:bodyPr wrap="none">
+            <a:spAutoFit/>
+          </a:bodyPr>
+          <a:lstStyle/>
+          <a:p>
+            <a:r>
+              <a:rPr lang="zh-CN" altLang="en-US" kern="100" dirty="0" smtClean="0">
+                <a:latin typeface="Calibri" panose="020F0502020204030204" pitchFamily="34" charset="0"/>
+                <a:ea typeface="宋体" panose="02010600030101010101" pitchFamily="2" charset="-122"/>
+                <a:cs typeface="Times New Roman" panose="02020603050405020304" pitchFamily="18" charset="0"/>
+              </a:rPr>
+              <a:t>（</a:t>
+            </a:r>
+            <a:r>
+              <a:rPr lang="zh-CN" altLang="en-US" kern="100" dirty="0">
+                <a:ea typeface="黑体" panose="02010609060101010101" pitchFamily="49" charset="-122"/>
+                <a:cs typeface="Times New Roman" panose="02020603050405020304" pitchFamily="18" charset="0"/>
+              </a:rPr>
+              <a:t>思政要素：学思结合、实事求是</a:t>
+            </a:r>
+            <a:r>
+              <a:rPr lang="zh-CN" altLang="en-US" kern="100" dirty="0">
+                <a:latin typeface="Calibri" panose="020F0502020204030204" pitchFamily="34" charset="0"/>
+                <a:ea typeface="宋体" panose="02010600030101010101" pitchFamily="2" charset="-122"/>
+                <a:cs typeface="Times New Roman" panose="02020603050405020304" pitchFamily="18" charset="0"/>
+              </a:rPr>
+              <a:t>）</a:t>
+            </a:r>
+            <a:endParaRPr lang="en-US" dirty="0"/>
           </a:p>
         </p:txBody>
       </p:sp>
@@ -7123,80 +8351,62 @@
           <a:chExt cx="0" cy="0"/>
         </a:xfrm>
       </p:grpSpPr>
-      <p:pic>
-        <p:nvPicPr>
-          <p:cNvPr id="2" name="Picture 1"/>
-          <p:cNvPicPr>
-            <a:picLocks noChangeAspect="1"/>
-          </p:cNvPicPr>
+      <p:sp>
+        <p:nvSpPr>
+          <p:cNvPr id="17" name="矩形 16"/>
+          <p:cNvSpPr/>
           <p:nvPr/>
-        </p:nvPicPr>
-        <p:blipFill rotWithShape="1">
-          <a:blip r:embed="rId3"/>
-          <a:srcRect l="16078" t="8528" r="14488" b="16904"/>
-          <a:stretch/>
-        </p:blipFill>
+        </p:nvSpPr>
         <p:spPr>
-          <a:xfrm rot="20538853">
-            <a:off x="530689" y="2458929"/>
-            <a:ext cx="2495550" cy="2006600"/>
+          <a:xfrm>
+            <a:off x="899740" y="3744966"/>
+            <a:ext cx="880668" cy="769214"/>
           </a:xfrm>
           <a:prstGeom prst="rect">
             <a:avLst/>
           </a:prstGeom>
+          <a:solidFill>
+            <a:srgbClr val="DCE3E8"/>
+          </a:solidFill>
+          <a:ln>
+            <a:noFill/>
+          </a:ln>
         </p:spPr>
-      </p:pic>
-      <p:pic>
-        <p:nvPicPr>
-          <p:cNvPr id="1026" name="Picture 2" descr="大脑"/>
-          <p:cNvPicPr>
-            <a:picLocks noChangeAspect="1" noChangeArrowheads="1"/>
-          </p:cNvPicPr>
-          <p:nvPr/>
-        </p:nvPicPr>
-        <p:blipFill>
-          <a:blip r:embed="rId4">
-            <a:extLst>
-              <a:ext uri="{28A0092B-C50C-407E-A947-70E740481C1C}">
-                <a14:useLocalDpi xmlns:a14="http://schemas.microsoft.com/office/drawing/2010/main" val="0"/>
-              </a:ext>
-            </a:extLst>
-          </a:blip>
-          <a:srcRect/>
-          <a:stretch>
-            <a:fillRect/>
-          </a:stretch>
-        </p:blipFill>
-        <p:spPr bwMode="auto">
-          <a:xfrm rot="525433">
-            <a:off x="6559549" y="2468561"/>
-            <a:ext cx="2095500" cy="2095501"/>
-          </a:xfrm>
-          <a:prstGeom prst="rect">
-            <a:avLst/>
-          </a:prstGeom>
-          <a:noFill/>
-          <a:extLst>
-            <a:ext uri="{909E8E84-426E-40DD-AFC4-6F175D3DCCD1}">
-              <a14:hiddenFill xmlns:a14="http://schemas.microsoft.com/office/drawing/2010/main">
-                <a:solidFill>
-                  <a:srgbClr val="FFFFFF"/>
-                </a:solidFill>
-              </a14:hiddenFill>
-            </a:ext>
-          </a:extLst>
-        </p:spPr>
-      </p:pic>
-      <p:sp>
-        <p:nvSpPr>
-          <p:cNvPr id="25" name="文本框 10"/>
+        <p:style>
+          <a:lnRef idx="2">
+            <a:schemeClr val="accent1">
+              <a:shade val="50000"/>
+            </a:schemeClr>
+          </a:lnRef>
+          <a:fillRef idx="1">
+            <a:schemeClr val="accent1"/>
+          </a:fillRef>
+          <a:effectRef idx="0">
+            <a:schemeClr val="accent1"/>
+          </a:effectRef>
+          <a:fontRef idx="minor">
+            <a:schemeClr val="lt1"/>
+          </a:fontRef>
+        </p:style>
+        <p:txBody>
+          <a:bodyPr rtlCol="0" anchor="ctr"/>
+          <a:lstStyle/>
+          <a:p>
+            <a:pPr algn="ctr"/>
+            <a:endParaRPr lang="zh-CN" altLang="en-US" dirty="0"/>
+          </a:p>
+        </p:txBody>
+      </p:sp>
+      <p:sp>
+        <p:nvSpPr>
+          <p:cNvPr id="4" name="文本框 10"/>
           <p:cNvSpPr txBox="1"/>
           <p:nvPr/>
         </p:nvSpPr>
         <p:spPr>
           <a:xfrm>
-            <a:off x="580032" y="631513"/>
-            <a:ext cx="3674468" cy="369332"/>
+            <a:off x="470991" y="396563"/>
+            <a:ext cx="8005168" cy="461665"/>
           </a:xfrm>
           <a:prstGeom prst="rect">
             <a:avLst/>
@@ -7209,45 +8419,7 @@
           </a:bodyPr>
           <a:lstStyle/>
           <a:p>
-            <a:r>
-              <a:rPr lang="zh-CN" altLang="en-US" sz="1800" dirty="0">
-                <a:solidFill>
-                  <a:srgbClr val="33495E"/>
-                </a:solidFill>
-                <a:latin typeface="微软雅黑" panose="020B0503020204020204" pitchFamily="34" charset="-122"/>
-                <a:ea typeface="微软雅黑" panose="020B0503020204020204" pitchFamily="34" charset="-122"/>
-                <a:sym typeface="+mn-ea"/>
-              </a:rPr>
-              <a:t>思辨计算机语言的优缺点</a:t>
-            </a:r>
-          </a:p>
-        </p:txBody>
-      </p:sp>
-      <p:sp>
-        <p:nvSpPr>
-          <p:cNvPr id="3" name="Rectangle 2"/>
-          <p:cNvSpPr/>
-          <p:nvPr/>
-        </p:nvSpPr>
-        <p:spPr>
-          <a:xfrm>
-            <a:off x="1860550" y="903098"/>
-            <a:ext cx="4787900" cy="3724096"/>
-          </a:xfrm>
-          <a:prstGeom prst="rect">
-            <a:avLst/>
-          </a:prstGeom>
-        </p:spPr>
-        <p:txBody>
-          <a:bodyPr wrap="square">
-            <a:spAutoFit/>
-          </a:bodyPr>
-          <a:lstStyle/>
-          <a:p>
             <a:pPr algn="just">
-              <a:spcBef>
-                <a:spcPts val="600"/>
-              </a:spcBef>
               <a:spcAft>
                 <a:spcPts val="713"/>
               </a:spcAft>
@@ -7256,126 +8428,16 @@
               </a:buClr>
             </a:pPr>
             <a:r>
-              <a:rPr lang="zh-CN" altLang="en-US" sz="2800" dirty="0">
+              <a:rPr lang="zh-CN" altLang="en-US" sz="2400" b="1" dirty="0">
                 <a:solidFill>
                   <a:srgbClr val="19B49B"/>
                 </a:solidFill>
                 <a:latin typeface="微软雅黑" panose="020B0503020204020204" pitchFamily="34" charset="-122"/>
                 <a:ea typeface="微软雅黑" panose="020B0503020204020204" pitchFamily="34" charset="-122"/>
               </a:rPr>
-              <a:t>       </a:t>
-            </a:r>
-            <a:r>
-              <a:rPr lang="zh-CN" altLang="en-US" sz="2600" dirty="0">
-                <a:solidFill>
-                  <a:srgbClr val="19B49B"/>
-                </a:solidFill>
-                <a:latin typeface="微软雅黑" panose="020B0503020204020204" pitchFamily="34" charset="-122"/>
-                <a:ea typeface="微软雅黑" panose="020B0503020204020204" pitchFamily="34" charset="-122"/>
-              </a:rPr>
-              <a:t>业界认为，</a:t>
-            </a:r>
-            <a:r>
-              <a:rPr lang="zh-CN" altLang="en-US" sz="2600" dirty="0" smtClean="0">
-                <a:solidFill>
-                  <a:srgbClr val="19B49B"/>
-                </a:solidFill>
-                <a:latin typeface="微软雅黑" panose="020B0503020204020204" pitchFamily="34" charset="-122"/>
-                <a:ea typeface="微软雅黑" panose="020B0503020204020204" pitchFamily="34" charset="-122"/>
-              </a:rPr>
-              <a:t>计算机语言最</a:t>
-            </a:r>
-            <a:r>
-              <a:rPr lang="zh-CN" altLang="en-US" sz="2600" dirty="0">
-                <a:solidFill>
-                  <a:srgbClr val="19B49B"/>
-                </a:solidFill>
-                <a:latin typeface="微软雅黑" panose="020B0503020204020204" pitchFamily="34" charset="-122"/>
-                <a:ea typeface="微软雅黑" panose="020B0503020204020204" pitchFamily="34" charset="-122"/>
-              </a:rPr>
-              <a:t>能隐喻</a:t>
-            </a:r>
-            <a:r>
-              <a:rPr lang="zh-CN" altLang="en-US" sz="2600" dirty="0" smtClean="0">
-                <a:solidFill>
-                  <a:srgbClr val="19B49B"/>
-                </a:solidFill>
-                <a:latin typeface="微软雅黑" panose="020B0503020204020204" pitchFamily="34" charset="-122"/>
-                <a:ea typeface="微软雅黑" panose="020B0503020204020204" pitchFamily="34" charset="-122"/>
-              </a:rPr>
-              <a:t>人脑语言，</a:t>
-            </a:r>
-            <a:r>
-              <a:rPr lang="zh-CN" altLang="en-US" sz="2600" dirty="0">
-                <a:solidFill>
-                  <a:srgbClr val="19B49B"/>
-                </a:solidFill>
-                <a:latin typeface="微软雅黑" panose="020B0503020204020204" pitchFamily="34" charset="-122"/>
-                <a:ea typeface="微软雅黑" panose="020B0503020204020204" pitchFamily="34" charset="-122"/>
-              </a:rPr>
-              <a:t>但也必须注意到人机隐喻的一些缺陷，例如，计算机是“</a:t>
-            </a:r>
-            <a:r>
-              <a:rPr lang="en-US" altLang="zh-CN" sz="2600" dirty="0">
-                <a:solidFill>
-                  <a:srgbClr val="19B49B"/>
-                </a:solidFill>
-                <a:latin typeface="微软雅黑" panose="020B0503020204020204" pitchFamily="34" charset="-122"/>
-                <a:ea typeface="微软雅黑" panose="020B0503020204020204" pitchFamily="34" charset="-122"/>
-              </a:rPr>
-              <a:t>0/1</a:t>
-            </a:r>
-            <a:r>
-              <a:rPr lang="zh-CN" altLang="en-US" sz="2600" dirty="0">
-                <a:solidFill>
-                  <a:srgbClr val="19B49B"/>
-                </a:solidFill>
-                <a:latin typeface="微软雅黑" panose="020B0503020204020204" pitchFamily="34" charset="-122"/>
-                <a:ea typeface="微软雅黑" panose="020B0503020204020204" pitchFamily="34" charset="-122"/>
-              </a:rPr>
-              <a:t>语言”的二进制电路组成的物性的机器，人是“字符</a:t>
-            </a:r>
-            <a:r>
-              <a:rPr lang="en-US" altLang="zh-CN" sz="2600" dirty="0">
-                <a:solidFill>
-                  <a:srgbClr val="19B49B"/>
-                </a:solidFill>
-                <a:latin typeface="微软雅黑" panose="020B0503020204020204" pitchFamily="34" charset="-122"/>
-                <a:ea typeface="微软雅黑" panose="020B0503020204020204" pitchFamily="34" charset="-122"/>
-              </a:rPr>
-              <a:t>/</a:t>
-            </a:r>
-            <a:r>
-              <a:rPr lang="zh-CN" altLang="en-US" sz="2600" dirty="0">
-                <a:solidFill>
-                  <a:srgbClr val="19B49B"/>
-                </a:solidFill>
-                <a:latin typeface="微软雅黑" panose="020B0503020204020204" pitchFamily="34" charset="-122"/>
-                <a:ea typeface="微软雅黑" panose="020B0503020204020204" pitchFamily="34" charset="-122"/>
-              </a:rPr>
-              <a:t>非字符语言”的神经系统组成的人性的生物体，所以，</a:t>
-            </a:r>
-            <a:r>
-              <a:rPr lang="zh-CN" altLang="en-US" sz="2600" dirty="0" smtClean="0">
-                <a:solidFill>
-                  <a:srgbClr val="19B49B"/>
-                </a:solidFill>
-                <a:latin typeface="微软雅黑" panose="020B0503020204020204" pitchFamily="34" charset="-122"/>
-                <a:ea typeface="微软雅黑" panose="020B0503020204020204" pitchFamily="34" charset="-122"/>
-              </a:rPr>
-              <a:t>“计算机编程语言本质”</a:t>
-            </a:r>
-            <a:r>
-              <a:rPr lang="zh-CN" altLang="en-US" sz="2600" dirty="0">
-                <a:solidFill>
-                  <a:srgbClr val="19B49B"/>
-                </a:solidFill>
-                <a:latin typeface="微软雅黑" panose="020B0503020204020204" pitchFamily="34" charset="-122"/>
-                <a:ea typeface="微软雅黑" panose="020B0503020204020204" pitchFamily="34" charset="-122"/>
-              </a:rPr>
-              <a:t>必须物性与人性统一。</a:t>
-            </a:r>
-            <a:endParaRPr lang="en-US" sz="2600" dirty="0">
+              <a:t>通用编程语言在教育软件开发中的应用：</a:t>
+            </a:r>
+            <a:endParaRPr lang="en-US" altLang="zh-CN" sz="2400" b="1" dirty="0">
               <a:solidFill>
                 <a:srgbClr val="19B49B"/>
               </a:solidFill>
@@ -7385,10 +8447,95 @@
           </a:p>
         </p:txBody>
       </p:sp>
+      <p:pic>
+        <p:nvPicPr>
+          <p:cNvPr id="5" name="Picture 4"/>
+          <p:cNvPicPr/>
+          <p:nvPr/>
+        </p:nvPicPr>
+        <p:blipFill>
+          <a:blip r:embed="rId3"/>
+          <a:stretch>
+            <a:fillRect/>
+          </a:stretch>
+        </p:blipFill>
+        <p:spPr>
+          <a:xfrm>
+            <a:off x="1327150" y="1073150"/>
+            <a:ext cx="7099299" cy="3441030"/>
+          </a:xfrm>
+          <a:prstGeom prst="rect">
+            <a:avLst/>
+          </a:prstGeom>
+        </p:spPr>
+      </p:pic>
+      <p:sp>
+        <p:nvSpPr>
+          <p:cNvPr id="6" name="Rectangle 5"/>
+          <p:cNvSpPr/>
+          <p:nvPr/>
+        </p:nvSpPr>
+        <p:spPr>
+          <a:xfrm>
+            <a:off x="4002047" y="4575213"/>
+            <a:ext cx="4852610" cy="307777"/>
+          </a:xfrm>
+          <a:prstGeom prst="rect">
+            <a:avLst/>
+          </a:prstGeom>
+        </p:spPr>
+        <p:txBody>
+          <a:bodyPr wrap="none">
+            <a:spAutoFit/>
+          </a:bodyPr>
+          <a:lstStyle/>
+          <a:p>
+            <a:r>
+              <a:rPr lang="zh-CN" altLang="en-US" kern="100" dirty="0">
+                <a:ea typeface="黑体" panose="02010609060101010101" pitchFamily="49" charset="-122"/>
+                <a:cs typeface="Times New Roman" panose="02020603050405020304" pitchFamily="18" charset="0"/>
+              </a:rPr>
+              <a:t>（</a:t>
+            </a:r>
+            <a:r>
+              <a:rPr lang="zh-CN" altLang="en-US" kern="100" dirty="0">
+                <a:ea typeface="黑体" panose="02010609060101010101" pitchFamily="49" charset="-122"/>
+                <a:cs typeface="Times New Roman" panose="02020603050405020304" pitchFamily="18" charset="0"/>
+              </a:rPr>
+              <a:t>思政要素</a:t>
+            </a:r>
+            <a:r>
+              <a:rPr lang="zh-CN" altLang="en-US" kern="100" dirty="0">
+                <a:ea typeface="黑体" panose="02010609060101010101" pitchFamily="49" charset="-122"/>
+                <a:cs typeface="Times New Roman" panose="02020603050405020304" pitchFamily="18" charset="0"/>
+              </a:rPr>
+              <a:t>：</a:t>
+            </a:r>
+            <a:r>
+              <a:rPr lang="zh-CN" altLang="en-US" kern="100" dirty="0">
+                <a:ea typeface="黑体" panose="02010609060101010101" pitchFamily="49" charset="-122"/>
+                <a:cs typeface="Times New Roman" panose="02020603050405020304" pitchFamily="18" charset="0"/>
+              </a:rPr>
+              <a:t>大国工匠、精益求精、工程伦理、科技报国</a:t>
+            </a:r>
+            <a:r>
+              <a:rPr lang="zh-CN" altLang="en-US" kern="100" dirty="0">
+                <a:ea typeface="黑体" panose="02010609060101010101" pitchFamily="49" charset="-122"/>
+                <a:cs typeface="Times New Roman" panose="02020603050405020304" pitchFamily="18" charset="0"/>
+              </a:rPr>
+              <a:t>）</a:t>
+            </a:r>
+            <a:endParaRPr lang="en-US" kern="100" dirty="0">
+              <a:ea typeface="黑体" panose="02010609060101010101" pitchFamily="49" charset="-122"/>
+              <a:cs typeface="Times New Roman" panose="02020603050405020304" pitchFamily="18" charset="0"/>
+            </a:endParaRPr>
+          </a:p>
+        </p:txBody>
+      </p:sp>
     </p:spTree>
     <p:extLst>
       <p:ext uri="{BB962C8B-B14F-4D97-AF65-F5344CB8AC3E}">
-        <p14:creationId xmlns:p14="http://schemas.microsoft.com/office/powerpoint/2010/main" val="309804018"/>
+        <p14:creationId xmlns:p14="http://schemas.microsoft.com/office/powerpoint/2010/main" val="4228952212"/>
       </p:ext>
     </p:extLst>
   </p:cSld>
